--- a/Calendario2026/Actividades/Actividad14_VLANs/Act14_VLANs.pptx
+++ b/Calendario2026/Actividades/Actividad14_VLANs/Act14_VLANs.pptx
@@ -144,9 +144,238 @@
 <file path=ppt/revisionInfo.xml><?xml version="1.0" encoding="utf-8"?>
 <p1510:revInfo xmlns:a="http://schemas.openxmlformats.org/drawingml/2006/main" xmlns:r="http://schemas.openxmlformats.org/officeDocument/2006/relationships" xmlns:p1510="http://schemas.microsoft.com/office/powerpoint/2015/10/main">
   <p1510:revLst>
-    <p1510:client id="{36C436E8-3DCB-4508-9009-E7D79E97C947}" v="69" dt="2026-03-02T18:25:14.519"/>
+    <p1510:client id="{820333FA-84D1-4B53-95C3-B2A2D23BD6E3}" v="37" dt="2026-07-17T20:07:14.771"/>
   </p1510:revLst>
 </p1510:revInfo>
+</file>
+
+<file path=ppt/changesInfos/changesInfo1.xml><?xml version="1.0" encoding="utf-8"?>
+<pc:chgInfo xmlns:a="http://schemas.openxmlformats.org/drawingml/2006/main" xmlns:r="http://schemas.openxmlformats.org/officeDocument/2006/relationships" xmlns:ac="http://schemas.microsoft.com/office/drawing/2013/main/command" xmlns:pc="http://schemas.microsoft.com/office/powerpoint/2013/main/command">
+  <pc:docChgLst>
+    <pc:chgData name="Lizethe Pérez Fuertes" userId="4ae9ef87-2a7d-42f8-8dfa-0a501a9e2ff4" providerId="ADAL" clId="{FDDD45CB-1330-4033-A842-3D2746AFF7C7}"/>
+    <pc:docChg chg="custSel modSld">
+      <pc:chgData name="Lizethe Pérez Fuertes" userId="4ae9ef87-2a7d-42f8-8dfa-0a501a9e2ff4" providerId="ADAL" clId="{FDDD45CB-1330-4033-A842-3D2746AFF7C7}" dt="2026-07-17T20:12:05.276" v="134" actId="1076"/>
+      <pc:docMkLst>
+        <pc:docMk/>
+      </pc:docMkLst>
+      <pc:sldChg chg="modSp mod">
+        <pc:chgData name="Lizethe Pérez Fuertes" userId="4ae9ef87-2a7d-42f8-8dfa-0a501a9e2ff4" providerId="ADAL" clId="{FDDD45CB-1330-4033-A842-3D2746AFF7C7}" dt="2026-07-17T20:12:05.276" v="134" actId="1076"/>
+        <pc:sldMkLst>
+          <pc:docMk/>
+          <pc:sldMk cId="0" sldId="261"/>
+        </pc:sldMkLst>
+        <pc:spChg chg="mod">
+          <ac:chgData name="Lizethe Pérez Fuertes" userId="4ae9ef87-2a7d-42f8-8dfa-0a501a9e2ff4" providerId="ADAL" clId="{FDDD45CB-1330-4033-A842-3D2746AFF7C7}" dt="2026-07-17T20:12:01.547" v="133" actId="1076"/>
+          <ac:spMkLst>
+            <pc:docMk/>
+            <pc:sldMk cId="0" sldId="261"/>
+            <ac:spMk id="2" creationId="{00000000-0000-0000-0000-000000000000}"/>
+          </ac:spMkLst>
+        </pc:spChg>
+        <pc:picChg chg="mod">
+          <ac:chgData name="Lizethe Pérez Fuertes" userId="4ae9ef87-2a7d-42f8-8dfa-0a501a9e2ff4" providerId="ADAL" clId="{FDDD45CB-1330-4033-A842-3D2746AFF7C7}" dt="2026-07-17T20:12:05.276" v="134" actId="1076"/>
+          <ac:picMkLst>
+            <pc:docMk/>
+            <pc:sldMk cId="0" sldId="261"/>
+            <ac:picMk id="5" creationId="{927F9FD1-2B32-4E2C-B331-0E2268D604DE}"/>
+          </ac:picMkLst>
+        </pc:picChg>
+      </pc:sldChg>
+      <pc:sldChg chg="addSp delSp modSp mod">
+        <pc:chgData name="Lizethe Pérez Fuertes" userId="4ae9ef87-2a7d-42f8-8dfa-0a501a9e2ff4" providerId="ADAL" clId="{FDDD45CB-1330-4033-A842-3D2746AFF7C7}" dt="2026-07-17T20:06:20.098" v="34" actId="113"/>
+        <pc:sldMkLst>
+          <pc:docMk/>
+          <pc:sldMk cId="536682890" sldId="340"/>
+        </pc:sldMkLst>
+        <pc:spChg chg="mod">
+          <ac:chgData name="Lizethe Pérez Fuertes" userId="4ae9ef87-2a7d-42f8-8dfa-0a501a9e2ff4" providerId="ADAL" clId="{FDDD45CB-1330-4033-A842-3D2746AFF7C7}" dt="2026-07-17T20:06:20.098" v="34" actId="113"/>
+          <ac:spMkLst>
+            <pc:docMk/>
+            <pc:sldMk cId="536682890" sldId="340"/>
+            <ac:spMk id="11" creationId="{38E0D603-2C5E-46E8-85CD-52C2F196B0AF}"/>
+          </ac:spMkLst>
+        </pc:spChg>
+        <pc:picChg chg="add mod ord">
+          <ac:chgData name="Lizethe Pérez Fuertes" userId="4ae9ef87-2a7d-42f8-8dfa-0a501a9e2ff4" providerId="ADAL" clId="{FDDD45CB-1330-4033-A842-3D2746AFF7C7}" dt="2026-07-17T20:05:05.158" v="16" actId="167"/>
+          <ac:picMkLst>
+            <pc:docMk/>
+            <pc:sldMk cId="536682890" sldId="340"/>
+            <ac:picMk id="4" creationId="{85C5EBEF-DB5D-84ED-7C09-9B1301E8405B}"/>
+          </ac:picMkLst>
+        </pc:picChg>
+        <pc:picChg chg="del">
+          <ac:chgData name="Lizethe Pérez Fuertes" userId="4ae9ef87-2a7d-42f8-8dfa-0a501a9e2ff4" providerId="ADAL" clId="{FDDD45CB-1330-4033-A842-3D2746AFF7C7}" dt="2026-07-17T20:04:52.550" v="10" actId="478"/>
+          <ac:picMkLst>
+            <pc:docMk/>
+            <pc:sldMk cId="536682890" sldId="340"/>
+            <ac:picMk id="5" creationId="{F79CD346-055E-7D20-8806-3ACF5721EC78}"/>
+          </ac:picMkLst>
+        </pc:picChg>
+      </pc:sldChg>
+      <pc:sldChg chg="modSp mod">
+        <pc:chgData name="Lizethe Pérez Fuertes" userId="4ae9ef87-2a7d-42f8-8dfa-0a501a9e2ff4" providerId="ADAL" clId="{FDDD45CB-1330-4033-A842-3D2746AFF7C7}" dt="2026-07-17T20:09:08.623" v="84" actId="20577"/>
+        <pc:sldMkLst>
+          <pc:docMk/>
+          <pc:sldMk cId="4006668520" sldId="347"/>
+        </pc:sldMkLst>
+        <pc:graphicFrameChg chg="modGraphic">
+          <ac:chgData name="Lizethe Pérez Fuertes" userId="4ae9ef87-2a7d-42f8-8dfa-0a501a9e2ff4" providerId="ADAL" clId="{FDDD45CB-1330-4033-A842-3D2746AFF7C7}" dt="2026-07-17T20:09:08.623" v="84" actId="20577"/>
+          <ac:graphicFrameMkLst>
+            <pc:docMk/>
+            <pc:sldMk cId="4006668520" sldId="347"/>
+            <ac:graphicFrameMk id="5" creationId="{D5DA73BA-9C18-4089-BD14-C3684A90530F}"/>
+          </ac:graphicFrameMkLst>
+        </pc:graphicFrameChg>
+      </pc:sldChg>
+      <pc:sldChg chg="addSp delSp modSp mod">
+        <pc:chgData name="Lizethe Pérez Fuertes" userId="4ae9ef87-2a7d-42f8-8dfa-0a501a9e2ff4" providerId="ADAL" clId="{FDDD45CB-1330-4033-A842-3D2746AFF7C7}" dt="2026-07-17T20:09:32.214" v="92" actId="1076"/>
+        <pc:sldMkLst>
+          <pc:docMk/>
+          <pc:sldMk cId="1569539773" sldId="355"/>
+        </pc:sldMkLst>
+        <pc:picChg chg="add mod">
+          <ac:chgData name="Lizethe Pérez Fuertes" userId="4ae9ef87-2a7d-42f8-8dfa-0a501a9e2ff4" providerId="ADAL" clId="{FDDD45CB-1330-4033-A842-3D2746AFF7C7}" dt="2026-07-17T20:09:32.214" v="92" actId="1076"/>
+          <ac:picMkLst>
+            <pc:docMk/>
+            <pc:sldMk cId="1569539773" sldId="355"/>
+            <ac:picMk id="4" creationId="{052C8A6F-F45B-FDCA-D51D-3B65712ED824}"/>
+          </ac:picMkLst>
+        </pc:picChg>
+        <pc:picChg chg="del">
+          <ac:chgData name="Lizethe Pérez Fuertes" userId="4ae9ef87-2a7d-42f8-8dfa-0a501a9e2ff4" providerId="ADAL" clId="{FDDD45CB-1330-4033-A842-3D2746AFF7C7}" dt="2026-07-17T20:09:17.247" v="85" actId="478"/>
+          <ac:picMkLst>
+            <pc:docMk/>
+            <pc:sldMk cId="1569539773" sldId="355"/>
+            <ac:picMk id="5" creationId="{EB7ADEE1-36F2-3C08-723E-B5770ED9B4E6}"/>
+          </ac:picMkLst>
+        </pc:picChg>
+      </pc:sldChg>
+      <pc:sldChg chg="addSp delSp modSp mod">
+        <pc:chgData name="Lizethe Pérez Fuertes" userId="4ae9ef87-2a7d-42f8-8dfa-0a501a9e2ff4" providerId="ADAL" clId="{FDDD45CB-1330-4033-A842-3D2746AFF7C7}" dt="2026-07-17T20:08:39.972" v="74" actId="1076"/>
+        <pc:sldMkLst>
+          <pc:docMk/>
+          <pc:sldMk cId="3465871034" sldId="356"/>
+        </pc:sldMkLst>
+        <pc:picChg chg="add mod">
+          <ac:chgData name="Lizethe Pérez Fuertes" userId="4ae9ef87-2a7d-42f8-8dfa-0a501a9e2ff4" providerId="ADAL" clId="{FDDD45CB-1330-4033-A842-3D2746AFF7C7}" dt="2026-07-17T20:08:39.972" v="74" actId="1076"/>
+          <ac:picMkLst>
+            <pc:docMk/>
+            <pc:sldMk cId="3465871034" sldId="356"/>
+            <ac:picMk id="3" creationId="{D46160E4-5CC8-7D09-F090-FDCA5E605929}"/>
+          </ac:picMkLst>
+        </pc:picChg>
+        <pc:picChg chg="del">
+          <ac:chgData name="Lizethe Pérez Fuertes" userId="4ae9ef87-2a7d-42f8-8dfa-0a501a9e2ff4" providerId="ADAL" clId="{FDDD45CB-1330-4033-A842-3D2746AFF7C7}" dt="2026-07-17T20:08:28.517" v="69" actId="478"/>
+          <ac:picMkLst>
+            <pc:docMk/>
+            <pc:sldMk cId="3465871034" sldId="356"/>
+            <ac:picMk id="4" creationId="{5AA96BDF-BEC4-B967-BA12-D6F39DAA73C1}"/>
+          </ac:picMkLst>
+        </pc:picChg>
+      </pc:sldChg>
+      <pc:sldChg chg="addSp delSp modSp mod">
+        <pc:chgData name="Lizethe Pérez Fuertes" userId="4ae9ef87-2a7d-42f8-8dfa-0a501a9e2ff4" providerId="ADAL" clId="{FDDD45CB-1330-4033-A842-3D2746AFF7C7}" dt="2026-07-17T20:07:14.771" v="60" actId="20577"/>
+        <pc:sldMkLst>
+          <pc:docMk/>
+          <pc:sldMk cId="2195457052" sldId="357"/>
+        </pc:sldMkLst>
+        <pc:spChg chg="mod">
+          <ac:chgData name="Lizethe Pérez Fuertes" userId="4ae9ef87-2a7d-42f8-8dfa-0a501a9e2ff4" providerId="ADAL" clId="{FDDD45CB-1330-4033-A842-3D2746AFF7C7}" dt="2026-07-17T20:07:14.771" v="60" actId="20577"/>
+          <ac:spMkLst>
+            <pc:docMk/>
+            <pc:sldMk cId="2195457052" sldId="357"/>
+            <ac:spMk id="9" creationId="{134ED542-4C7D-4B50-8C07-A5B19B10A18D}"/>
+          </ac:spMkLst>
+        </pc:spChg>
+        <pc:picChg chg="add mod ord">
+          <ac:chgData name="Lizethe Pérez Fuertes" userId="4ae9ef87-2a7d-42f8-8dfa-0a501a9e2ff4" providerId="ADAL" clId="{FDDD45CB-1330-4033-A842-3D2746AFF7C7}" dt="2026-07-17T20:06:57.298" v="41" actId="1076"/>
+          <ac:picMkLst>
+            <pc:docMk/>
+            <pc:sldMk cId="2195457052" sldId="357"/>
+            <ac:picMk id="4" creationId="{8322C4C9-DB25-1324-6EE7-F32B1204EAFB}"/>
+          </ac:picMkLst>
+        </pc:picChg>
+        <pc:picChg chg="del">
+          <ac:chgData name="Lizethe Pérez Fuertes" userId="4ae9ef87-2a7d-42f8-8dfa-0a501a9e2ff4" providerId="ADAL" clId="{FDDD45CB-1330-4033-A842-3D2746AFF7C7}" dt="2026-07-17T20:06:38.504" v="35" actId="478"/>
+          <ac:picMkLst>
+            <pc:docMk/>
+            <pc:sldMk cId="2195457052" sldId="357"/>
+            <ac:picMk id="5" creationId="{AED2598F-2E9F-C66F-7942-6CDBCFF5840B}"/>
+          </ac:picMkLst>
+        </pc:picChg>
+      </pc:sldChg>
+      <pc:sldChg chg="addSp delSp modSp mod">
+        <pc:chgData name="Lizethe Pérez Fuertes" userId="4ae9ef87-2a7d-42f8-8dfa-0a501a9e2ff4" providerId="ADAL" clId="{FDDD45CB-1330-4033-A842-3D2746AFF7C7}" dt="2026-07-17T20:04:42.476" v="9" actId="1076"/>
+        <pc:sldMkLst>
+          <pc:docMk/>
+          <pc:sldMk cId="4001625024" sldId="358"/>
+        </pc:sldMkLst>
+        <pc:picChg chg="add mod">
+          <ac:chgData name="Lizethe Pérez Fuertes" userId="4ae9ef87-2a7d-42f8-8dfa-0a501a9e2ff4" providerId="ADAL" clId="{FDDD45CB-1330-4033-A842-3D2746AFF7C7}" dt="2026-07-17T20:04:42.476" v="9" actId="1076"/>
+          <ac:picMkLst>
+            <pc:docMk/>
+            <pc:sldMk cId="4001625024" sldId="358"/>
+            <ac:picMk id="4" creationId="{B0FC9CF1-F510-2BEB-2B19-7C782EE7DCCD}"/>
+          </ac:picMkLst>
+        </pc:picChg>
+        <pc:picChg chg="del">
+          <ac:chgData name="Lizethe Pérez Fuertes" userId="4ae9ef87-2a7d-42f8-8dfa-0a501a9e2ff4" providerId="ADAL" clId="{FDDD45CB-1330-4033-A842-3D2746AFF7C7}" dt="2026-07-17T20:04:19.217" v="0" actId="478"/>
+          <ac:picMkLst>
+            <pc:docMk/>
+            <pc:sldMk cId="4001625024" sldId="358"/>
+            <ac:picMk id="5" creationId="{4DC6B032-87D3-7C7F-265B-A797D17D2AAD}"/>
+          </ac:picMkLst>
+        </pc:picChg>
+      </pc:sldChg>
+      <pc:sldChg chg="addSp delSp modSp mod">
+        <pc:chgData name="Lizethe Pérez Fuertes" userId="4ae9ef87-2a7d-42f8-8dfa-0a501a9e2ff4" providerId="ADAL" clId="{FDDD45CB-1330-4033-A842-3D2746AFF7C7}" dt="2026-07-17T20:09:00.851" v="80" actId="1076"/>
+        <pc:sldMkLst>
+          <pc:docMk/>
+          <pc:sldMk cId="4272764351" sldId="364"/>
+        </pc:sldMkLst>
+        <pc:picChg chg="add mod">
+          <ac:chgData name="Lizethe Pérez Fuertes" userId="4ae9ef87-2a7d-42f8-8dfa-0a501a9e2ff4" providerId="ADAL" clId="{FDDD45CB-1330-4033-A842-3D2746AFF7C7}" dt="2026-07-17T20:09:00.851" v="80" actId="1076"/>
+          <ac:picMkLst>
+            <pc:docMk/>
+            <pc:sldMk cId="4272764351" sldId="364"/>
+            <ac:picMk id="3" creationId="{156AE580-ECB0-3C51-DAE9-B0912D8B7610}"/>
+          </ac:picMkLst>
+        </pc:picChg>
+        <pc:picChg chg="del">
+          <ac:chgData name="Lizethe Pérez Fuertes" userId="4ae9ef87-2a7d-42f8-8dfa-0a501a9e2ff4" providerId="ADAL" clId="{FDDD45CB-1330-4033-A842-3D2746AFF7C7}" dt="2026-07-17T20:08:47.279" v="75" actId="478"/>
+          <ac:picMkLst>
+            <pc:docMk/>
+            <pc:sldMk cId="4272764351" sldId="364"/>
+            <ac:picMk id="4" creationId="{FEB58639-DB54-9659-41BB-030B00EE2F3A}"/>
+          </ac:picMkLst>
+        </pc:picChg>
+      </pc:sldChg>
+      <pc:sldChg chg="addSp delSp modSp mod">
+        <pc:chgData name="Lizethe Pérez Fuertes" userId="4ae9ef87-2a7d-42f8-8dfa-0a501a9e2ff4" providerId="ADAL" clId="{FDDD45CB-1330-4033-A842-3D2746AFF7C7}" dt="2026-07-17T20:08:14.560" v="68" actId="1076"/>
+        <pc:sldMkLst>
+          <pc:docMk/>
+          <pc:sldMk cId="1370110524" sldId="365"/>
+        </pc:sldMkLst>
+        <pc:picChg chg="del">
+          <ac:chgData name="Lizethe Pérez Fuertes" userId="4ae9ef87-2a7d-42f8-8dfa-0a501a9e2ff4" providerId="ADAL" clId="{FDDD45CB-1330-4033-A842-3D2746AFF7C7}" dt="2026-07-17T20:07:48.147" v="61" actId="478"/>
+          <ac:picMkLst>
+            <pc:docMk/>
+            <pc:sldMk cId="1370110524" sldId="365"/>
+            <ac:picMk id="4" creationId="{C5B68192-12F1-9C84-F7F1-D2666B36541B}"/>
+          </ac:picMkLst>
+        </pc:picChg>
+        <pc:picChg chg="add mod">
+          <ac:chgData name="Lizethe Pérez Fuertes" userId="4ae9ef87-2a7d-42f8-8dfa-0a501a9e2ff4" providerId="ADAL" clId="{FDDD45CB-1330-4033-A842-3D2746AFF7C7}" dt="2026-07-17T20:08:14.560" v="68" actId="1076"/>
+          <ac:picMkLst>
+            <pc:docMk/>
+            <pc:sldMk cId="1370110524" sldId="365"/>
+            <ac:picMk id="6" creationId="{3EF09992-1C91-E91E-2535-277F869187DF}"/>
+          </ac:picMkLst>
+        </pc:picChg>
+      </pc:sldChg>
+    </pc:docChg>
+  </pc:docChgLst>
+</pc:chgInfo>
 </file>
 
 <file path=ppt/notesMasters/notesMaster1.xml><?xml version="1.0" encoding="utf-8"?>
@@ -1342,7 +1571,7 @@
           <a:p>
             <a:fld id="{1D8BD707-D9CF-40AE-B4C6-C98DA3205C09}" type="datetimeFigureOut">
               <a:rPr lang="en-US"/>
-              <a:t>3/2/2026</a:t>
+              <a:t>7/17/2026</a:t>
             </a:fld>
             <a:endParaRPr lang="en-US" dirty="0"/>
           </a:p>
@@ -1519,7 +1748,7 @@
           <a:p>
             <a:fld id="{1D8BD707-D9CF-40AE-B4C6-C98DA3205C09}" type="datetimeFigureOut">
               <a:rPr lang="en-US"/>
-              <a:t>3/2/2026</a:t>
+              <a:t>7/17/2026</a:t>
             </a:fld>
             <a:endParaRPr lang="en-US" dirty="0"/>
           </a:p>
@@ -1733,7 +1962,7 @@
           <a:p>
             <a:fld id="{1D8BD707-D9CF-40AE-B4C6-C98DA3205C09}" type="datetimeFigureOut">
               <a:rPr lang="en-US"/>
-              <a:t>3/2/2026</a:t>
+              <a:t>7/17/2026</a:t>
             </a:fld>
             <a:endParaRPr lang="en-US" dirty="0"/>
           </a:p>
@@ -1881,7 +2110,7 @@
           <a:p>
             <a:fld id="{1D8BD707-D9CF-40AE-B4C6-C98DA3205C09}" type="datetimeFigureOut">
               <a:rPr lang="en-US"/>
-              <a:t>3/2/2026</a:t>
+              <a:t>7/17/2026</a:t>
             </a:fld>
             <a:endParaRPr lang="en-US" dirty="0"/>
           </a:p>
@@ -2037,7 +2266,7 @@
           <a:p>
             <a:fld id="{1D8BD707-D9CF-40AE-B4C6-C98DA3205C09}" type="datetimeFigureOut">
               <a:rPr lang="en-US"/>
-              <a:t>3/2/2026</a:t>
+              <a:t>7/17/2026</a:t>
             </a:fld>
             <a:endParaRPr lang="en-US" dirty="0"/>
           </a:p>
@@ -2122,7 +2351,7 @@
           <a:p>
             <a:fld id="{5E75A0DC-66C6-4CEC-A5EB-F8C97CEC3796}" type="datetimeFigureOut">
               <a:rPr lang="es-MX" smtClean="0"/>
-              <a:t>02/03/2026</a:t>
+              <a:t>17/07/2026</a:t>
             </a:fld>
             <a:endParaRPr lang="es-MX" dirty="0"/>
           </a:p>
@@ -2379,7 +2608,7 @@
           <a:p>
             <a:fld id="{5E75A0DC-66C6-4CEC-A5EB-F8C97CEC3796}" type="datetimeFigureOut">
               <a:rPr lang="es-MX" smtClean="0"/>
-              <a:t>02/03/2026</a:t>
+              <a:t>17/07/2026</a:t>
             </a:fld>
             <a:endParaRPr lang="es-MX" dirty="0"/>
           </a:p>
@@ -2629,7 +2858,7 @@
           <a:p>
             <a:fld id="{1D8BD707-D9CF-40AE-B4C6-C98DA3205C09}" type="datetimeFigureOut">
               <a:rPr lang="en-US"/>
-              <a:t>3/2/2026</a:t>
+              <a:t>7/17/2026</a:t>
             </a:fld>
             <a:endParaRPr lang="en-US" dirty="0"/>
           </a:p>
@@ -3245,10 +3474,10 @@
       </p:sp>
       <p:pic>
         <p:nvPicPr>
-          <p:cNvPr id="4" name="Picture 3">
+          <p:cNvPr id="3" name="Imagen 2">
             <a:extLst>
               <a:ext uri="{FF2B5EF4-FFF2-40B4-BE49-F238E27FC236}">
-                <a16:creationId xmlns:a16="http://schemas.microsoft.com/office/drawing/2014/main" id="{5AA96BDF-BEC4-B967-BA12-D6F39DAA73C1}"/>
+                <a16:creationId xmlns:a16="http://schemas.microsoft.com/office/drawing/2014/main" id="{D46160E4-5CC8-7D09-F090-FDCA5E605929}"/>
               </a:ext>
             </a:extLst>
           </p:cNvPr>
@@ -3265,8 +3494,8 @@
         </p:blipFill>
         <p:spPr>
           <a:xfrm>
-            <a:off x="1714500" y="1752600"/>
-            <a:ext cx="8763000" cy="4803021"/>
+            <a:off x="1447800" y="1600200"/>
+            <a:ext cx="9144000" cy="5004541"/>
           </a:xfrm>
           <a:prstGeom prst="rect">
             <a:avLst/>
@@ -3309,36 +3538,6 @@
           <a:chExt cx="0" cy="0"/>
         </a:xfrm>
       </p:grpSpPr>
-      <p:pic>
-        <p:nvPicPr>
-          <p:cNvPr id="4" name="Picture 3">
-            <a:extLst>
-              <a:ext uri="{FF2B5EF4-FFF2-40B4-BE49-F238E27FC236}">
-                <a16:creationId xmlns:a16="http://schemas.microsoft.com/office/drawing/2014/main" id="{FEB58639-DB54-9659-41BB-030B00EE2F3A}"/>
-              </a:ext>
-            </a:extLst>
-          </p:cNvPr>
-          <p:cNvPicPr>
-            <a:picLocks noChangeAspect="1"/>
-          </p:cNvPicPr>
-          <p:nvPr/>
-        </p:nvPicPr>
-        <p:blipFill>
-          <a:blip r:embed="rId3"/>
-          <a:stretch>
-            <a:fillRect/>
-          </a:stretch>
-        </p:blipFill>
-        <p:spPr>
-          <a:xfrm>
-            <a:off x="2781300" y="2569505"/>
-            <a:ext cx="7239000" cy="3967714"/>
-          </a:xfrm>
-          <a:prstGeom prst="rect">
-            <a:avLst/>
-          </a:prstGeom>
-        </p:spPr>
-      </p:pic>
       <p:sp>
         <p:nvSpPr>
           <p:cNvPr id="8" name="Rectangle 2">
@@ -3727,6 +3926,36 @@
           </a:p>
         </p:txBody>
       </p:sp>
+      <p:pic>
+        <p:nvPicPr>
+          <p:cNvPr id="3" name="Imagen 2">
+            <a:extLst>
+              <a:ext uri="{FF2B5EF4-FFF2-40B4-BE49-F238E27FC236}">
+                <a16:creationId xmlns:a16="http://schemas.microsoft.com/office/drawing/2014/main" id="{156AE580-ECB0-3C51-DAE9-B0912D8B7610}"/>
+              </a:ext>
+            </a:extLst>
+          </p:cNvPr>
+          <p:cNvPicPr>
+            <a:picLocks noChangeAspect="1"/>
+          </p:cNvPicPr>
+          <p:nvPr/>
+        </p:nvPicPr>
+        <p:blipFill>
+          <a:blip r:embed="rId3"/>
+          <a:stretch>
+            <a:fillRect/>
+          </a:stretch>
+        </p:blipFill>
+        <p:spPr>
+          <a:xfrm>
+            <a:off x="1905000" y="2514600"/>
+            <a:ext cx="7543800" cy="4128747"/>
+          </a:xfrm>
+          <a:prstGeom prst="rect">
+            <a:avLst/>
+          </a:prstGeom>
+        </p:spPr>
+      </p:pic>
     </p:spTree>
     <p:extLst>
       <p:ext uri="{BB962C8B-B14F-4D97-AF65-F5344CB8AC3E}">
@@ -4197,7 +4426,13 @@
           <p:cNvGraphicFramePr>
             <a:graphicFrameLocks noGrp="1"/>
           </p:cNvGraphicFramePr>
-          <p:nvPr/>
+          <p:nvPr>
+            <p:extLst>
+              <p:ext uri="{D42A27DB-BD31-4B8C-83A1-F6EECF244321}">
+                <p14:modId xmlns:p14="http://schemas.microsoft.com/office/powerpoint/2010/main" val="1552004092"/>
+              </p:ext>
+            </p:extLst>
+          </p:nvPr>
         </p:nvGraphicFramePr>
         <p:xfrm>
           <a:off x="952499" y="3630221"/>
@@ -5808,7 +6043,7 @@
                           <a:ea typeface="Calibri" panose="020F0502020204030204" pitchFamily="34" charset="0"/>
                           <a:cs typeface="Arial" panose="020B0604020202020204" pitchFamily="34" charset="0"/>
                         </a:rPr>
-                        <a:t>1</a:t>
+                        <a:t>333</a:t>
                       </a:r>
                     </a:p>
                   </a:txBody>
@@ -7341,10 +7576,10 @@
       </p:sp>
       <p:pic>
         <p:nvPicPr>
-          <p:cNvPr id="5" name="Picture 4">
+          <p:cNvPr id="4" name="Imagen 3">
             <a:extLst>
               <a:ext uri="{FF2B5EF4-FFF2-40B4-BE49-F238E27FC236}">
-                <a16:creationId xmlns:a16="http://schemas.microsoft.com/office/drawing/2014/main" id="{EB7ADEE1-36F2-3C08-723E-B5770ED9B4E6}"/>
+                <a16:creationId xmlns:a16="http://schemas.microsoft.com/office/drawing/2014/main" id="{052C8A6F-F45B-FDCA-D51D-3B65712ED824}"/>
               </a:ext>
             </a:extLst>
           </p:cNvPr>
@@ -7361,8 +7596,8 @@
         </p:blipFill>
         <p:spPr>
           <a:xfrm>
-            <a:off x="1738635" y="1828800"/>
-            <a:ext cx="8714730" cy="4776564"/>
+            <a:off x="1778484" y="1865438"/>
+            <a:ext cx="8635031" cy="4725981"/>
           </a:xfrm>
           <a:prstGeom prst="rect">
             <a:avLst/>
@@ -9489,8 +9724,8 @@
         </p:nvSpPr>
         <p:spPr>
           <a:xfrm>
-            <a:off x="742950" y="1277144"/>
-            <a:ext cx="11053119" cy="3895682"/>
+            <a:off x="957605" y="1277144"/>
+            <a:ext cx="10839450" cy="3882088"/>
           </a:xfrm>
           <a:prstGeom prst="rect">
             <a:avLst/>
@@ -9511,434 +9746,372 @@
               </a:spcAft>
             </a:pPr>
             <a:r>
-              <a:rPr sz="2000" spc="-5" dirty="0">
-                <a:latin typeface="Calibri"/>
+              <a:rPr sz="1600" spc="-5" dirty="0">
                 <a:cs typeface="Calibri"/>
               </a:rPr>
               <a:t>Debemo</a:t>
             </a:r>
             <a:r>
-              <a:rPr sz="2000" dirty="0">
-                <a:latin typeface="Calibri"/>
+              <a:rPr sz="1600" dirty="0">
                 <a:cs typeface="Calibri"/>
               </a:rPr>
               <a:t>s</a:t>
             </a:r>
             <a:r>
-              <a:rPr sz="2000" spc="20" dirty="0">
-                <a:latin typeface="Calibri"/>
+              <a:rPr sz="1600" spc="20" dirty="0">
                 <a:cs typeface="Calibri"/>
               </a:rPr>
               <a:t> </a:t>
             </a:r>
             <a:r>
-              <a:rPr sz="2000" spc="-45" dirty="0">
-                <a:latin typeface="Calibri"/>
+              <a:rPr sz="1600" spc="-45" dirty="0">
                 <a:cs typeface="Calibri"/>
               </a:rPr>
               <a:t>r</a:t>
             </a:r>
             <a:r>
-              <a:rPr sz="2000" dirty="0">
-                <a:latin typeface="Calibri"/>
+              <a:rPr sz="1600" dirty="0">
                 <a:cs typeface="Calibri"/>
               </a:rPr>
               <a:t>eali</a:t>
             </a:r>
             <a:r>
-              <a:rPr sz="2000" spc="-35" dirty="0">
-                <a:latin typeface="Calibri"/>
+              <a:rPr sz="1600" spc="-35" dirty="0">
                 <a:cs typeface="Calibri"/>
               </a:rPr>
               <a:t>z</a:t>
             </a:r>
             <a:r>
-              <a:rPr sz="2000" dirty="0">
-                <a:latin typeface="Calibri"/>
+              <a:rPr sz="1600" dirty="0">
                 <a:cs typeface="Calibri"/>
               </a:rPr>
               <a:t>ar</a:t>
             </a:r>
             <a:r>
-              <a:rPr sz="2000" spc="25" dirty="0">
-                <a:latin typeface="Calibri"/>
+              <a:rPr sz="1600" spc="25" dirty="0">
                 <a:cs typeface="Calibri"/>
               </a:rPr>
               <a:t> </a:t>
             </a:r>
             <a:r>
-              <a:rPr sz="2000" dirty="0">
-                <a:latin typeface="Calibri"/>
+              <a:rPr sz="1600" dirty="0">
                 <a:cs typeface="Calibri"/>
               </a:rPr>
               <a:t>el</a:t>
             </a:r>
             <a:r>
-              <a:rPr sz="2000" spc="20" dirty="0">
-                <a:latin typeface="Calibri"/>
+              <a:rPr sz="1600" spc="20" dirty="0">
                 <a:cs typeface="Calibri"/>
               </a:rPr>
               <a:t> </a:t>
             </a:r>
             <a:r>
-              <a:rPr sz="2000" spc="-5" dirty="0">
-                <a:latin typeface="Calibri"/>
+              <a:rPr sz="1600" spc="-5" dirty="0">
                 <a:cs typeface="Calibri"/>
               </a:rPr>
               <a:t>dis</a:t>
             </a:r>
             <a:r>
-              <a:rPr sz="2000" spc="-15" dirty="0">
-                <a:latin typeface="Calibri"/>
+              <a:rPr sz="1600" spc="-15" dirty="0">
                 <a:cs typeface="Calibri"/>
               </a:rPr>
               <a:t>e</a:t>
             </a:r>
             <a:r>
-              <a:rPr sz="2000" spc="-5" dirty="0">
-                <a:latin typeface="Calibri"/>
+              <a:rPr sz="1600" spc="-5" dirty="0">
                 <a:cs typeface="Calibri"/>
               </a:rPr>
               <a:t>ñ</a:t>
             </a:r>
             <a:r>
-              <a:rPr sz="2000" dirty="0">
-                <a:latin typeface="Calibri"/>
+              <a:rPr sz="1600" dirty="0">
                 <a:cs typeface="Calibri"/>
               </a:rPr>
               <a:t>o</a:t>
             </a:r>
             <a:r>
-              <a:rPr sz="2000" spc="10" dirty="0">
-                <a:latin typeface="Calibri"/>
+              <a:rPr sz="1600" spc="10" dirty="0">
                 <a:cs typeface="Calibri"/>
               </a:rPr>
               <a:t> </a:t>
             </a:r>
             <a:r>
-              <a:rPr sz="2000" spc="-20" dirty="0">
-                <a:latin typeface="Calibri"/>
+              <a:rPr sz="1600" spc="-20" dirty="0">
                 <a:cs typeface="Calibri"/>
               </a:rPr>
               <a:t>c</a:t>
             </a:r>
             <a:r>
-              <a:rPr sz="2000" spc="-5" dirty="0">
-                <a:latin typeface="Calibri"/>
+              <a:rPr sz="1600" spc="-5" dirty="0">
                 <a:cs typeface="Calibri"/>
               </a:rPr>
               <a:t>o</a:t>
             </a:r>
             <a:r>
-              <a:rPr sz="2000" dirty="0">
-                <a:latin typeface="Calibri"/>
+              <a:rPr sz="1600" dirty="0">
                 <a:cs typeface="Calibri"/>
               </a:rPr>
               <a:t>n</a:t>
             </a:r>
             <a:r>
-              <a:rPr sz="2000" spc="10" dirty="0">
-                <a:latin typeface="Calibri"/>
+              <a:rPr sz="1600" spc="10" dirty="0">
                 <a:cs typeface="Calibri"/>
               </a:rPr>
               <a:t> </a:t>
             </a:r>
             <a:r>
-              <a:rPr sz="2000" spc="-5" dirty="0">
-                <a:latin typeface="Calibri"/>
+              <a:rPr sz="1600" spc="-5" dirty="0">
                 <a:cs typeface="Calibri"/>
               </a:rPr>
               <a:t>bas</a:t>
             </a:r>
             <a:r>
-              <a:rPr sz="2000" dirty="0">
-                <a:latin typeface="Calibri"/>
+              <a:rPr sz="1600" dirty="0">
                 <a:cs typeface="Calibri"/>
               </a:rPr>
               <a:t>e</a:t>
             </a:r>
             <a:r>
-              <a:rPr sz="2000" spc="35" dirty="0">
-                <a:latin typeface="Calibri"/>
+              <a:rPr sz="1600" spc="35" dirty="0">
                 <a:cs typeface="Calibri"/>
               </a:rPr>
               <a:t> </a:t>
             </a:r>
             <a:r>
-              <a:rPr sz="2000" dirty="0">
-                <a:latin typeface="Calibri"/>
+              <a:rPr sz="1600" dirty="0">
                 <a:cs typeface="Calibri"/>
               </a:rPr>
               <a:t>en</a:t>
             </a:r>
             <a:r>
-              <a:rPr sz="2000" spc="15" dirty="0">
-                <a:latin typeface="Calibri"/>
+              <a:rPr sz="1600" spc="15" dirty="0">
                 <a:cs typeface="Calibri"/>
               </a:rPr>
               <a:t> </a:t>
             </a:r>
             <a:r>
-              <a:rPr sz="2000" spc="-45" dirty="0">
-                <a:latin typeface="Calibri"/>
+              <a:rPr sz="1600" spc="-45" dirty="0">
                 <a:cs typeface="Calibri"/>
               </a:rPr>
               <a:t>r</a:t>
             </a:r>
             <a:r>
-              <a:rPr sz="2000" dirty="0">
-                <a:latin typeface="Calibri"/>
+              <a:rPr sz="1600" dirty="0">
                 <a:cs typeface="Calibri"/>
               </a:rPr>
               <a:t>e</a:t>
             </a:r>
             <a:r>
-              <a:rPr sz="2000" spc="-25" dirty="0">
-                <a:latin typeface="Calibri"/>
+              <a:rPr sz="1600" spc="-25" dirty="0">
                 <a:cs typeface="Calibri"/>
               </a:rPr>
               <a:t>s</a:t>
             </a:r>
             <a:r>
-              <a:rPr sz="2000" dirty="0">
-                <a:latin typeface="Calibri"/>
+              <a:rPr sz="1600" dirty="0">
                 <a:cs typeface="Calibri"/>
               </a:rPr>
               <a:t>tri</a:t>
             </a:r>
             <a:r>
-              <a:rPr sz="2000" spc="-5" dirty="0">
-                <a:latin typeface="Calibri"/>
+              <a:rPr sz="1600" spc="-5" dirty="0">
                 <a:cs typeface="Calibri"/>
               </a:rPr>
               <a:t>c</a:t>
             </a:r>
             <a:r>
-              <a:rPr sz="2000" dirty="0">
-                <a:latin typeface="Calibri"/>
+              <a:rPr sz="1600" dirty="0">
                 <a:cs typeface="Calibri"/>
               </a:rPr>
               <a:t>c</a:t>
             </a:r>
             <a:r>
-              <a:rPr sz="2000" spc="-10" dirty="0">
-                <a:latin typeface="Calibri"/>
+              <a:rPr sz="1600" spc="-10" dirty="0">
                 <a:cs typeface="Calibri"/>
               </a:rPr>
               <a:t>i</a:t>
             </a:r>
             <a:r>
-              <a:rPr sz="2000" spc="-5" dirty="0">
-                <a:latin typeface="Calibri"/>
+              <a:rPr sz="1600" spc="-5" dirty="0">
                 <a:cs typeface="Calibri"/>
               </a:rPr>
               <a:t>o</a:t>
             </a:r>
             <a:r>
-              <a:rPr sz="2000" spc="-10" dirty="0">
-                <a:latin typeface="Calibri"/>
+              <a:rPr sz="1600" spc="-10" dirty="0">
                 <a:cs typeface="Calibri"/>
               </a:rPr>
               <a:t>n</a:t>
             </a:r>
             <a:r>
-              <a:rPr sz="2000" dirty="0">
-                <a:latin typeface="Calibri"/>
+              <a:rPr sz="1600" dirty="0">
                 <a:cs typeface="Calibri"/>
               </a:rPr>
               <a:t>es</a:t>
             </a:r>
             <a:r>
-              <a:rPr sz="2000" spc="20" dirty="0">
-                <a:latin typeface="Calibri"/>
+              <a:rPr sz="1600" spc="20" dirty="0">
                 <a:cs typeface="Calibri"/>
               </a:rPr>
               <a:t> </a:t>
             </a:r>
             <a:r>
-              <a:rPr sz="2000" spc="-5" dirty="0">
-                <a:latin typeface="Calibri"/>
+              <a:rPr sz="1600" spc="-5" dirty="0">
                 <a:cs typeface="Calibri"/>
               </a:rPr>
               <a:t>qu</a:t>
             </a:r>
             <a:r>
-              <a:rPr sz="2000" dirty="0">
-                <a:latin typeface="Calibri"/>
+              <a:rPr sz="1600" dirty="0">
                 <a:cs typeface="Calibri"/>
               </a:rPr>
               <a:t>e</a:t>
             </a:r>
             <a:r>
-              <a:rPr sz="2000" spc="25" dirty="0">
-                <a:latin typeface="Calibri"/>
+              <a:rPr sz="1600" spc="25" dirty="0">
                 <a:cs typeface="Calibri"/>
               </a:rPr>
               <a:t> </a:t>
             </a:r>
             <a:r>
-              <a:rPr sz="2000" spc="-5" dirty="0">
-                <a:latin typeface="Calibri"/>
+              <a:rPr sz="1600" spc="-5" dirty="0">
                 <a:cs typeface="Calibri"/>
               </a:rPr>
               <a:t>h</a:t>
             </a:r>
             <a:r>
-              <a:rPr sz="2000" spc="5" dirty="0">
-                <a:latin typeface="Calibri"/>
+              <a:rPr sz="1600" spc="5" dirty="0">
                 <a:cs typeface="Calibri"/>
               </a:rPr>
               <a:t>a</a:t>
             </a:r>
             <a:r>
-              <a:rPr sz="2000" dirty="0">
-                <a:latin typeface="Calibri"/>
+              <a:rPr sz="1600" dirty="0">
                 <a:cs typeface="Calibri"/>
               </a:rPr>
               <a:t>n</a:t>
             </a:r>
             <a:r>
-              <a:rPr sz="2000" spc="20" dirty="0">
-                <a:latin typeface="Calibri"/>
+              <a:rPr sz="1600" spc="20" dirty="0">
                 <a:cs typeface="Calibri"/>
               </a:rPr>
               <a:t> </a:t>
             </a:r>
             <a:r>
-              <a:rPr sz="2000" spc="-5" dirty="0">
-                <a:latin typeface="Calibri"/>
+              <a:rPr sz="1600" spc="-5" dirty="0">
                 <a:cs typeface="Calibri"/>
               </a:rPr>
               <a:t>sid</a:t>
             </a:r>
             <a:r>
-              <a:rPr sz="2000" dirty="0">
-                <a:latin typeface="Calibri"/>
+              <a:rPr sz="1600" dirty="0">
                 <a:cs typeface="Calibri"/>
               </a:rPr>
               <a:t>o</a:t>
             </a:r>
             <a:r>
-              <a:rPr sz="2000" spc="10" dirty="0">
-                <a:latin typeface="Calibri"/>
+              <a:rPr sz="1600" spc="10" dirty="0">
                 <a:cs typeface="Calibri"/>
               </a:rPr>
               <a:t> </a:t>
             </a:r>
             <a:r>
-              <a:rPr sz="2000" dirty="0" err="1">
-                <a:latin typeface="Calibri"/>
+              <a:rPr sz="1600" dirty="0" err="1">
                 <a:cs typeface="Calibri"/>
               </a:rPr>
               <a:t>e</a:t>
             </a:r>
             <a:r>
-              <a:rPr sz="2000" spc="-25" dirty="0" err="1">
-                <a:latin typeface="Calibri"/>
+              <a:rPr sz="1600" spc="-25" dirty="0" err="1">
                 <a:cs typeface="Calibri"/>
               </a:rPr>
               <a:t>st</a:t>
             </a:r>
             <a:r>
-              <a:rPr sz="2000" dirty="0" err="1">
-                <a:latin typeface="Calibri"/>
+              <a:rPr sz="1600" dirty="0" err="1">
                 <a:cs typeface="Calibri"/>
               </a:rPr>
               <a:t>ablecidas</a:t>
             </a:r>
             <a:r>
-              <a:rPr sz="2000" spc="25" dirty="0">
-                <a:latin typeface="Calibri"/>
+              <a:rPr sz="1600" spc="25" dirty="0">
                 <a:cs typeface="Calibri"/>
               </a:rPr>
               <a:t> </a:t>
             </a:r>
             <a:r>
-              <a:rPr sz="2000" spc="-5" dirty="0">
-                <a:latin typeface="Calibri"/>
+              <a:rPr sz="1600" spc="-5" dirty="0">
                 <a:cs typeface="Calibri"/>
               </a:rPr>
               <a:t>p</a:t>
             </a:r>
             <a:r>
-              <a:rPr sz="2000" spc="-10" dirty="0">
-                <a:latin typeface="Calibri"/>
+              <a:rPr sz="1600" spc="-10" dirty="0">
                 <a:cs typeface="Calibri"/>
               </a:rPr>
               <a:t>or</a:t>
             </a:r>
             <a:r>
-              <a:rPr lang="es-ES" sz="2000" spc="-10" dirty="0">
-                <a:latin typeface="Calibri"/>
+              <a:rPr lang="es-ES" sz="1600" spc="-10" dirty="0">
                 <a:cs typeface="Calibri"/>
               </a:rPr>
               <a:t> </a:t>
             </a:r>
             <a:r>
-              <a:rPr sz="2000" spc="5" dirty="0">
-                <a:latin typeface="Calibri"/>
+              <a:rPr sz="1600" spc="5" dirty="0">
                 <a:cs typeface="Calibri"/>
               </a:rPr>
               <a:t>e</a:t>
             </a:r>
             <a:r>
-              <a:rPr sz="2000" dirty="0">
-                <a:latin typeface="Calibri"/>
+              <a:rPr sz="1600" dirty="0">
                 <a:cs typeface="Calibri"/>
               </a:rPr>
               <a:t>l</a:t>
             </a:r>
             <a:r>
-              <a:rPr sz="2000" spc="-5" dirty="0">
-                <a:latin typeface="Calibri"/>
+              <a:rPr sz="1600" spc="-5" dirty="0">
                 <a:cs typeface="Calibri"/>
               </a:rPr>
               <a:t> </a:t>
             </a:r>
             <a:r>
-              <a:rPr lang="es-MX" sz="2000" dirty="0">
-                <a:latin typeface="Calibri"/>
+              <a:rPr lang="es-MX" sz="1600" dirty="0">
                 <a:cs typeface="Calibri"/>
               </a:rPr>
               <a:t>cli</a:t>
             </a:r>
             <a:r>
-              <a:rPr lang="es-MX" sz="2000" spc="10" dirty="0">
-                <a:latin typeface="Calibri"/>
+              <a:rPr lang="es-MX" sz="1600" spc="10" dirty="0">
                 <a:cs typeface="Calibri"/>
               </a:rPr>
               <a:t>e</a:t>
             </a:r>
             <a:r>
-              <a:rPr lang="es-MX" sz="2000" spc="-25" dirty="0">
-                <a:latin typeface="Calibri"/>
+              <a:rPr lang="es-MX" sz="1600" spc="-25" dirty="0">
                 <a:cs typeface="Calibri"/>
               </a:rPr>
               <a:t>n</a:t>
             </a:r>
             <a:r>
-              <a:rPr lang="es-MX" sz="2000" spc="-35" dirty="0">
-                <a:latin typeface="Calibri"/>
+              <a:rPr lang="es-MX" sz="1600" spc="-35" dirty="0">
                 <a:cs typeface="Calibri"/>
               </a:rPr>
               <a:t>t</a:t>
             </a:r>
             <a:r>
-              <a:rPr lang="es-MX" sz="2000" spc="-5" dirty="0">
-                <a:latin typeface="Calibri"/>
+              <a:rPr lang="es-MX" sz="1600" spc="-5" dirty="0">
                 <a:cs typeface="Calibri"/>
               </a:rPr>
               <a:t>e</a:t>
             </a:r>
             <a:r>
-              <a:rPr lang="es-ES" sz="2000" spc="-5" dirty="0">
-                <a:latin typeface="Calibri"/>
+              <a:rPr lang="es-ES" sz="1600" spc="-5" dirty="0">
                 <a:cs typeface="Calibri"/>
               </a:rPr>
               <a:t>:</a:t>
             </a:r>
-            <a:endParaRPr sz="2000" dirty="0">
-              <a:latin typeface="Calibri"/>
+            <a:endParaRPr sz="1600" dirty="0">
               <a:cs typeface="Calibri"/>
             </a:endParaRPr>
           </a:p>
@@ -9955,28 +10128,24 @@
               </a:tabLst>
             </a:pPr>
             <a:r>
-              <a:rPr lang="es-MX" sz="2000" spc="-20" dirty="0">
-                <a:latin typeface="Calibri"/>
+              <a:rPr lang="es-MX" sz="1600" spc="-20" dirty="0">
                 <a:cs typeface="Calibri"/>
               </a:rPr>
               <a:t>Configura la interface </a:t>
             </a:r>
             <a:r>
-              <a:rPr lang="es-MX" sz="2000" b="1" spc="-20" dirty="0">
-                <a:latin typeface="Calibri"/>
+              <a:rPr lang="es-MX" sz="1600" b="1" spc="-20" dirty="0">
                 <a:cs typeface="Calibri"/>
               </a:rPr>
               <a:t>s0/0/1</a:t>
             </a:r>
             <a:r>
-              <a:rPr lang="es-MX" sz="2000" spc="-20" dirty="0">
-                <a:latin typeface="Calibri"/>
+              <a:rPr lang="es-MX" sz="1600" spc="-20" dirty="0">
                 <a:cs typeface="Calibri"/>
               </a:rPr>
               <a:t>.</a:t>
             </a:r>
-            <a:endParaRPr lang="es-ES" sz="2000" dirty="0">
-              <a:latin typeface="Calibri"/>
+            <a:endParaRPr lang="es-ES" sz="1600" dirty="0">
               <a:cs typeface="Calibri"/>
             </a:endParaRPr>
           </a:p>
@@ -9992,221 +10161,208 @@
               </a:tabLst>
             </a:pPr>
             <a:r>
-              <a:rPr lang="es-MX" sz="2000" spc="-20" noProof="1">
-                <a:latin typeface="Calibri"/>
+              <a:rPr lang="es-MX" sz="1600" spc="-20" noProof="1">
                 <a:cs typeface="Calibri"/>
               </a:rPr>
               <a:t>Deb</a:t>
             </a:r>
             <a:r>
-              <a:rPr lang="es-MX" sz="2000" spc="-10" noProof="1">
-                <a:latin typeface="Calibri"/>
+              <a:rPr lang="es-MX" sz="1600" spc="-10" noProof="1">
                 <a:cs typeface="Calibri"/>
               </a:rPr>
               <a:t>e</a:t>
             </a:r>
             <a:r>
-              <a:rPr lang="es-MX" sz="2000" noProof="1">
-                <a:latin typeface="Calibri"/>
+              <a:rPr lang="es-MX" sz="1600" noProof="1">
                 <a:cs typeface="Calibri"/>
               </a:rPr>
               <a:t>mos</a:t>
             </a:r>
             <a:r>
-              <a:rPr sz="2000" spc="-20" dirty="0">
-                <a:latin typeface="Calibri"/>
+              <a:rPr sz="1600" spc="-20" dirty="0">
                 <a:cs typeface="Calibri"/>
               </a:rPr>
               <a:t> </a:t>
             </a:r>
             <a:r>
-              <a:rPr sz="2000" spc="-5" dirty="0">
-                <a:latin typeface="Calibri"/>
+              <a:rPr sz="1600" spc="-5" dirty="0" err="1">
                 <a:cs typeface="Calibri"/>
               </a:rPr>
               <a:t>utili</a:t>
             </a:r>
             <a:r>
-              <a:rPr sz="2000" spc="-30" dirty="0">
-                <a:latin typeface="Calibri"/>
+              <a:rPr sz="1600" spc="-30" dirty="0" err="1">
                 <a:cs typeface="Calibri"/>
               </a:rPr>
               <a:t>z</a:t>
             </a:r>
             <a:r>
-              <a:rPr sz="2000" spc="-10" dirty="0">
-                <a:latin typeface="Calibri"/>
-                <a:cs typeface="Calibri"/>
-              </a:rPr>
-              <a:t>ar t</a:t>
-            </a:r>
-            <a:r>
-              <a:rPr sz="2000" spc="-45" dirty="0">
-                <a:latin typeface="Calibri"/>
+              <a:rPr sz="1600" spc="-10" dirty="0" err="1">
+                <a:cs typeface="Calibri"/>
+              </a:rPr>
+              <a:t>ar</a:t>
+            </a:r>
+            <a:r>
+              <a:rPr sz="1600" spc="-10" dirty="0">
+                <a:cs typeface="Calibri"/>
+              </a:rPr>
+              <a:t> </a:t>
+            </a:r>
+            <a:r>
+              <a:rPr lang="es-MX" sz="1600" spc="-10" dirty="0">
+                <a:cs typeface="Calibri"/>
+              </a:rPr>
+              <a:t>cuatro</a:t>
+            </a:r>
+            <a:r>
+              <a:rPr sz="1600" spc="-5" dirty="0">
+                <a:cs typeface="Calibri"/>
+              </a:rPr>
+              <a:t> </a:t>
+            </a:r>
+            <a:r>
+              <a:rPr sz="1600" b="1" spc="-20" dirty="0">
+                <a:cs typeface="Calibri"/>
+              </a:rPr>
+              <a:t>VLAN</a:t>
+            </a:r>
+            <a:r>
+              <a:rPr sz="1600" b="1" spc="-15" dirty="0">
+                <a:cs typeface="Calibri"/>
+              </a:rPr>
+              <a:t>S</a:t>
+            </a:r>
+            <a:r>
+              <a:rPr sz="1600" b="1" spc="-5" dirty="0">
+                <a:cs typeface="Calibri"/>
+              </a:rPr>
+              <a:t> </a:t>
+            </a:r>
+            <a:r>
+              <a:rPr sz="1600" spc="-5" dirty="0">
+                <a:cs typeface="Calibri"/>
+              </a:rPr>
+              <a:t>(M</a:t>
+            </a:r>
+            <a:r>
+              <a:rPr sz="1600" spc="5" dirty="0">
+                <a:cs typeface="Calibri"/>
+              </a:rPr>
+              <a:t>a</a:t>
+            </a:r>
+            <a:r>
+              <a:rPr sz="1600" spc="-5" dirty="0">
+                <a:cs typeface="Calibri"/>
+              </a:rPr>
+              <a:t>na</a:t>
+            </a:r>
+            <a:r>
+              <a:rPr sz="1600" spc="-25" dirty="0">
+                <a:cs typeface="Calibri"/>
+              </a:rPr>
+              <a:t>g</a:t>
+            </a:r>
+            <a:r>
+              <a:rPr sz="1600" spc="-15" dirty="0">
+                <a:cs typeface="Calibri"/>
+              </a:rPr>
+              <a:t>e</a:t>
+            </a:r>
+            <a:r>
+              <a:rPr sz="1600" spc="-210" dirty="0">
                 <a:cs typeface="Calibri"/>
               </a:rPr>
               <a:t>r</a:t>
             </a:r>
             <a:r>
-              <a:rPr sz="2000" spc="-15" dirty="0">
-                <a:latin typeface="Calibri"/>
-                <a:cs typeface="Calibri"/>
-              </a:rPr>
-              <a:t>es</a:t>
-            </a:r>
-            <a:r>
-              <a:rPr sz="2000" spc="-5" dirty="0">
-                <a:latin typeface="Calibri"/>
+              <a:rPr sz="1600" spc="-10" dirty="0">
+                <a:cs typeface="Calibri"/>
+              </a:rPr>
+              <a:t>,</a:t>
+            </a:r>
+            <a:r>
+              <a:rPr lang="es-MX" sz="1600" spc="-10" dirty="0">
+                <a:cs typeface="Calibri"/>
+              </a:rPr>
+              <a:t>s</a:t>
+            </a:r>
+            <a:r>
+              <a:rPr sz="1600" spc="-25" dirty="0">
                 <a:cs typeface="Calibri"/>
               </a:rPr>
               <a:t> </a:t>
             </a:r>
             <a:r>
-              <a:rPr sz="2000" b="1" spc="-20" dirty="0">
-                <a:latin typeface="Calibri"/>
-                <a:cs typeface="Calibri"/>
-              </a:rPr>
-              <a:t>VLAN</a:t>
-            </a:r>
-            <a:r>
-              <a:rPr sz="2000" b="1" spc="-15" dirty="0">
-                <a:latin typeface="Calibri"/>
-                <a:cs typeface="Calibri"/>
-              </a:rPr>
-              <a:t>S</a:t>
-            </a:r>
-            <a:r>
-              <a:rPr sz="2000" b="1" spc="-5" dirty="0">
-                <a:latin typeface="Calibri"/>
-                <a:cs typeface="Calibri"/>
-              </a:rPr>
-              <a:t> </a:t>
-            </a:r>
-            <a:r>
-              <a:rPr sz="2000" spc="-5" dirty="0">
-                <a:latin typeface="Calibri"/>
-                <a:cs typeface="Calibri"/>
-              </a:rPr>
-              <a:t>(M</a:t>
-            </a:r>
-            <a:r>
-              <a:rPr sz="2000" spc="5" dirty="0">
-                <a:latin typeface="Calibri"/>
-                <a:cs typeface="Calibri"/>
-              </a:rPr>
-              <a:t>a</a:t>
-            </a:r>
-            <a:r>
-              <a:rPr sz="2000" spc="-5" dirty="0">
-                <a:latin typeface="Calibri"/>
-                <a:cs typeface="Calibri"/>
-              </a:rPr>
-              <a:t>na</a:t>
-            </a:r>
-            <a:r>
-              <a:rPr sz="2000" spc="-25" dirty="0">
-                <a:latin typeface="Calibri"/>
-                <a:cs typeface="Calibri"/>
-              </a:rPr>
-              <a:t>g</a:t>
-            </a:r>
-            <a:r>
-              <a:rPr sz="2000" spc="-15" dirty="0">
-                <a:latin typeface="Calibri"/>
+              <a:rPr sz="1600" spc="-20" dirty="0">
+                <a:cs typeface="Calibri"/>
+              </a:rPr>
+              <a:t>Us</a:t>
+            </a:r>
+            <a:r>
+              <a:rPr sz="1600" spc="-15" dirty="0">
                 <a:cs typeface="Calibri"/>
               </a:rPr>
               <a:t>e</a:t>
             </a:r>
             <a:r>
-              <a:rPr sz="2000" spc="-210" dirty="0">
-                <a:latin typeface="Calibri"/>
+              <a:rPr sz="1600" spc="-40" dirty="0">
                 <a:cs typeface="Calibri"/>
               </a:rPr>
               <a:t>r</a:t>
             </a:r>
             <a:r>
-              <a:rPr sz="2000" spc="-10" dirty="0">
-                <a:latin typeface="Calibri"/>
+              <a:rPr sz="1600" spc="-5" dirty="0">
+                <a:cs typeface="Calibri"/>
+              </a:rPr>
+              <a:t>s</a:t>
+            </a:r>
+            <a:r>
+              <a:rPr lang="es-MX" sz="1600" spc="-5" dirty="0">
                 <a:cs typeface="Calibri"/>
               </a:rPr>
               <a:t>,</a:t>
             </a:r>
             <a:r>
-              <a:rPr lang="es-MX" sz="2000" spc="-10" dirty="0">
-                <a:latin typeface="Calibri"/>
+              <a:rPr sz="1600" spc="-5" dirty="0">
+                <a:cs typeface="Calibri"/>
+              </a:rPr>
+              <a:t> S</a:t>
+            </a:r>
+            <a:r>
+              <a:rPr sz="1600" spc="5" dirty="0">
+                <a:cs typeface="Calibri"/>
+              </a:rPr>
+              <a:t>er</a:t>
+            </a:r>
+            <a:r>
+              <a:rPr sz="1600" spc="-10" dirty="0">
+                <a:cs typeface="Calibri"/>
+              </a:rPr>
+              <a:t>vice</a:t>
+            </a:r>
+            <a:r>
+              <a:rPr sz="1600" dirty="0">
                 <a:cs typeface="Calibri"/>
               </a:rPr>
               <a:t>s</a:t>
             </a:r>
             <a:r>
-              <a:rPr sz="2000" spc="-25" dirty="0">
-                <a:latin typeface="Calibri"/>
-                <a:cs typeface="Calibri"/>
-              </a:rPr>
-              <a:t> </a:t>
-            </a:r>
-            <a:r>
-              <a:rPr sz="2000" spc="-20" dirty="0">
-                <a:latin typeface="Calibri"/>
-                <a:cs typeface="Calibri"/>
-              </a:rPr>
-              <a:t>Us</a:t>
-            </a:r>
-            <a:r>
-              <a:rPr sz="2000" spc="-15" dirty="0">
-                <a:latin typeface="Calibri"/>
-                <a:cs typeface="Calibri"/>
-              </a:rPr>
-              <a:t>e</a:t>
-            </a:r>
-            <a:r>
-              <a:rPr sz="2000" spc="-40" dirty="0">
-                <a:latin typeface="Calibri"/>
-                <a:cs typeface="Calibri"/>
-              </a:rPr>
-              <a:t>r</a:t>
-            </a:r>
-            <a:r>
-              <a:rPr sz="2000" spc="-5" dirty="0">
-                <a:latin typeface="Calibri"/>
-                <a:cs typeface="Calibri"/>
-              </a:rPr>
-              <a:t>s</a:t>
-            </a:r>
-            <a:r>
-              <a:rPr lang="es-MX" sz="2000" spc="-5" dirty="0">
-                <a:latin typeface="Calibri"/>
-                <a:cs typeface="Calibri"/>
-              </a:rPr>
-              <a:t> y</a:t>
-            </a:r>
-            <a:r>
-              <a:rPr sz="2000" spc="-5" dirty="0">
-                <a:latin typeface="Calibri"/>
-                <a:cs typeface="Calibri"/>
-              </a:rPr>
-              <a:t> S</a:t>
-            </a:r>
-            <a:r>
-              <a:rPr sz="2000" spc="5" dirty="0">
-                <a:latin typeface="Calibri"/>
-                <a:cs typeface="Calibri"/>
-              </a:rPr>
-              <a:t>er</a:t>
-            </a:r>
-            <a:r>
-              <a:rPr sz="2000" spc="-10" dirty="0">
-                <a:latin typeface="Calibri"/>
-                <a:cs typeface="Calibri"/>
-              </a:rPr>
-              <a:t>vice</a:t>
-            </a:r>
-            <a:r>
-              <a:rPr sz="2000" dirty="0">
-                <a:latin typeface="Calibri"/>
-                <a:cs typeface="Calibri"/>
-              </a:rPr>
-              <a:t>s)</a:t>
+              <a:rPr lang="es-MX" sz="1600" dirty="0">
+                <a:cs typeface="Calibri"/>
+              </a:rPr>
+              <a:t> y </a:t>
+            </a:r>
+            <a:r>
+              <a:rPr lang="es-MX" sz="1600" dirty="0" err="1">
+                <a:cs typeface="Calibri"/>
+              </a:rPr>
+              <a:t>Gestion</a:t>
+            </a:r>
+            <a:r>
+              <a:rPr sz="1600" dirty="0">
+                <a:cs typeface="Calibri"/>
+              </a:rPr>
+              <a:t>)</a:t>
             </a:r>
           </a:p>
           <a:p>
@@ -10221,246 +10377,211 @@
               </a:tabLst>
             </a:pPr>
             <a:r>
-              <a:rPr lang="es-MX" sz="2000" spc="-5" dirty="0">
-                <a:latin typeface="Calibri"/>
+              <a:rPr lang="es-MX" sz="1600" spc="-5" dirty="0">
                 <a:cs typeface="Calibri"/>
               </a:rPr>
               <a:t>Las tres </a:t>
             </a:r>
             <a:r>
-              <a:rPr lang="es-MX" sz="2000" b="1" spc="-5" dirty="0" err="1">
-                <a:latin typeface="Calibri"/>
+              <a:rPr lang="es-MX" sz="1600" b="1" spc="-5" dirty="0" err="1">
                 <a:cs typeface="Calibri"/>
               </a:rPr>
               <a:t>VLANs</a:t>
             </a:r>
             <a:r>
-              <a:rPr lang="es-MX" sz="2000" spc="-5" dirty="0">
-                <a:latin typeface="Calibri"/>
+              <a:rPr lang="es-MX" sz="1600" spc="-5" dirty="0">
                 <a:cs typeface="Calibri"/>
               </a:rPr>
               <a:t> (M</a:t>
             </a:r>
             <a:r>
-              <a:rPr lang="es-MX" sz="2000" spc="5" dirty="0">
-                <a:latin typeface="Calibri"/>
+              <a:rPr lang="es-MX" sz="1600" spc="5" dirty="0">
                 <a:cs typeface="Calibri"/>
               </a:rPr>
               <a:t>a</a:t>
             </a:r>
             <a:r>
-              <a:rPr lang="es-MX" sz="2000" spc="-5" dirty="0">
-                <a:latin typeface="Calibri"/>
+              <a:rPr lang="es-MX" sz="1600" spc="-5" dirty="0">
                 <a:cs typeface="Calibri"/>
               </a:rPr>
               <a:t>na</a:t>
             </a:r>
             <a:r>
-              <a:rPr lang="es-MX" sz="2000" spc="-25" dirty="0">
-                <a:latin typeface="Calibri"/>
+              <a:rPr lang="es-MX" sz="1600" spc="-25" dirty="0">
                 <a:cs typeface="Calibri"/>
               </a:rPr>
               <a:t>g</a:t>
             </a:r>
             <a:r>
-              <a:rPr lang="es-MX" sz="2000" spc="-15" dirty="0">
-                <a:latin typeface="Calibri"/>
+              <a:rPr lang="es-MX" sz="1600" spc="-15" dirty="0">
                 <a:cs typeface="Calibri"/>
               </a:rPr>
               <a:t>e</a:t>
             </a:r>
             <a:r>
-              <a:rPr lang="es-MX" sz="2000" spc="-210" dirty="0">
-                <a:latin typeface="Calibri"/>
+              <a:rPr lang="es-MX" sz="1600" spc="-210" dirty="0">
                 <a:cs typeface="Calibri"/>
               </a:rPr>
               <a:t>rs</a:t>
             </a:r>
             <a:r>
-              <a:rPr lang="es-MX" sz="2000" spc="-10" dirty="0">
-                <a:latin typeface="Calibri"/>
+              <a:rPr lang="es-MX" sz="1600" spc="-10" dirty="0">
                 <a:cs typeface="Calibri"/>
               </a:rPr>
               <a:t>,</a:t>
             </a:r>
             <a:r>
-              <a:rPr lang="es-MX" sz="2000" spc="-25" dirty="0">
-                <a:latin typeface="Calibri"/>
+              <a:rPr lang="es-MX" sz="1600" spc="-25" dirty="0">
                 <a:cs typeface="Calibri"/>
               </a:rPr>
               <a:t> </a:t>
             </a:r>
             <a:r>
-              <a:rPr lang="es-MX" sz="2000" spc="-20" dirty="0" err="1">
-                <a:latin typeface="Calibri"/>
+              <a:rPr lang="es-MX" sz="1600" spc="-20" dirty="0" err="1">
                 <a:cs typeface="Calibri"/>
               </a:rPr>
               <a:t>Us</a:t>
             </a:r>
             <a:r>
-              <a:rPr lang="es-MX" sz="2000" spc="-15" dirty="0" err="1">
-                <a:latin typeface="Calibri"/>
+              <a:rPr lang="es-MX" sz="1600" spc="-15" dirty="0" err="1">
                 <a:cs typeface="Calibri"/>
               </a:rPr>
               <a:t>e</a:t>
             </a:r>
             <a:r>
-              <a:rPr lang="es-MX" sz="2000" spc="-40" dirty="0" err="1">
-                <a:latin typeface="Calibri"/>
+              <a:rPr lang="es-MX" sz="1600" spc="-40" dirty="0" err="1">
                 <a:cs typeface="Calibri"/>
               </a:rPr>
               <a:t>r</a:t>
             </a:r>
             <a:r>
-              <a:rPr lang="es-MX" sz="2000" spc="-5" dirty="0" err="1">
-                <a:latin typeface="Calibri"/>
+              <a:rPr lang="es-MX" sz="1600" spc="-5" dirty="0" err="1">
                 <a:cs typeface="Calibri"/>
               </a:rPr>
               <a:t>s</a:t>
             </a:r>
             <a:r>
-              <a:rPr lang="es-MX" sz="2000" spc="-5" dirty="0">
-                <a:latin typeface="Calibri"/>
+              <a:rPr lang="es-MX" sz="1600" spc="-5" dirty="0">
                 <a:cs typeface="Calibri"/>
               </a:rPr>
               <a:t> y S</a:t>
             </a:r>
             <a:r>
-              <a:rPr lang="es-MX" sz="2000" spc="5" dirty="0">
-                <a:latin typeface="Calibri"/>
+              <a:rPr lang="es-MX" sz="1600" spc="5" dirty="0">
                 <a:cs typeface="Calibri"/>
               </a:rPr>
               <a:t>er</a:t>
             </a:r>
             <a:r>
-              <a:rPr lang="es-MX" sz="2000" spc="-10" dirty="0">
-                <a:latin typeface="Calibri"/>
+              <a:rPr lang="es-MX" sz="1600" spc="-10" dirty="0">
                 <a:cs typeface="Calibri"/>
               </a:rPr>
               <a:t>vice</a:t>
             </a:r>
             <a:r>
-              <a:rPr lang="es-MX" sz="2000" dirty="0">
-                <a:latin typeface="Calibri"/>
+              <a:rPr lang="es-MX" sz="1600" dirty="0">
                 <a:cs typeface="Calibri"/>
               </a:rPr>
               <a:t>s) </a:t>
             </a:r>
             <a:r>
-              <a:rPr lang="es-MX" sz="2000" spc="-5" dirty="0">
-                <a:latin typeface="Calibri"/>
+              <a:rPr lang="es-MX" sz="1600" spc="-5" dirty="0">
                 <a:cs typeface="Calibri"/>
               </a:rPr>
               <a:t>obtendrán </a:t>
             </a:r>
             <a:r>
-              <a:rPr sz="2000" spc="-5" dirty="0" err="1">
-                <a:latin typeface="Calibri"/>
+              <a:rPr sz="1600" spc="-5" dirty="0" err="1">
                 <a:cs typeface="Calibri"/>
               </a:rPr>
               <a:t>di</a:t>
             </a:r>
             <a:r>
-              <a:rPr sz="2000" spc="-35" dirty="0" err="1">
-                <a:latin typeface="Calibri"/>
+              <a:rPr sz="1600" spc="-35" dirty="0" err="1">
                 <a:cs typeface="Calibri"/>
               </a:rPr>
               <a:t>r</a:t>
             </a:r>
             <a:r>
-              <a:rPr sz="2000" spc="-15" dirty="0" err="1">
-                <a:latin typeface="Calibri"/>
+              <a:rPr sz="1600" spc="-15" dirty="0" err="1">
                 <a:cs typeface="Calibri"/>
               </a:rPr>
               <a:t>e</a:t>
             </a:r>
             <a:r>
-              <a:rPr sz="2000" spc="-10" dirty="0" err="1">
-                <a:latin typeface="Calibri"/>
+              <a:rPr sz="1600" spc="-10" dirty="0" err="1">
                 <a:cs typeface="Calibri"/>
               </a:rPr>
               <a:t>c</a:t>
             </a:r>
             <a:r>
-              <a:rPr sz="2000" dirty="0" err="1">
-                <a:latin typeface="Calibri"/>
+              <a:rPr sz="1600" dirty="0" err="1">
                 <a:cs typeface="Calibri"/>
               </a:rPr>
               <a:t>ci</a:t>
             </a:r>
             <a:r>
-              <a:rPr lang="es-MX" sz="2000" dirty="0" err="1">
-                <a:latin typeface="Calibri"/>
+              <a:rPr lang="es-MX" sz="1600" dirty="0" err="1">
                 <a:cs typeface="Calibri"/>
               </a:rPr>
               <a:t>ones</a:t>
             </a:r>
             <a:r>
-              <a:rPr sz="2000" spc="-15" dirty="0">
-                <a:latin typeface="Calibri"/>
+              <a:rPr sz="1600" spc="-15" dirty="0">
                 <a:cs typeface="Calibri"/>
               </a:rPr>
               <a:t> IP</a:t>
             </a:r>
             <a:r>
-              <a:rPr sz="2000" spc="-10" dirty="0">
-                <a:latin typeface="Calibri"/>
+              <a:rPr sz="1600" spc="-10" dirty="0">
                 <a:cs typeface="Calibri"/>
               </a:rPr>
               <a:t> </a:t>
             </a:r>
             <a:r>
-              <a:rPr sz="2000" spc="-5" dirty="0" err="1">
-                <a:latin typeface="Calibri"/>
+              <a:rPr sz="1600" spc="-5" dirty="0" err="1">
                 <a:cs typeface="Calibri"/>
               </a:rPr>
               <a:t>dinámi</a:t>
             </a:r>
             <a:r>
-              <a:rPr sz="2000" spc="-10" dirty="0" err="1">
-                <a:latin typeface="Calibri"/>
+              <a:rPr sz="1600" spc="-10" dirty="0" err="1">
                 <a:cs typeface="Calibri"/>
               </a:rPr>
               <a:t>c</a:t>
             </a:r>
             <a:r>
-              <a:rPr sz="2000" dirty="0" err="1">
-                <a:latin typeface="Calibri"/>
+              <a:rPr sz="1600" dirty="0" err="1">
                 <a:cs typeface="Calibri"/>
               </a:rPr>
               <a:t>a</a:t>
             </a:r>
             <a:r>
-              <a:rPr lang="es-MX" sz="2000" dirty="0">
-                <a:latin typeface="Calibri"/>
+              <a:rPr lang="es-MX" sz="1600" dirty="0">
                 <a:cs typeface="Calibri"/>
               </a:rPr>
               <a:t>s</a:t>
             </a:r>
             <a:r>
-              <a:rPr sz="2000" spc="-10" dirty="0">
-                <a:latin typeface="Calibri"/>
+              <a:rPr sz="1600" spc="-10" dirty="0">
                 <a:cs typeface="Calibri"/>
               </a:rPr>
               <a:t> </a:t>
             </a:r>
             <a:r>
-              <a:rPr sz="2000" dirty="0">
-                <a:latin typeface="Calibri"/>
+              <a:rPr sz="1600" dirty="0">
                 <a:cs typeface="Calibri"/>
               </a:rPr>
               <a:t>(</a:t>
             </a:r>
             <a:r>
-              <a:rPr sz="2000" b="1" spc="-5" dirty="0">
-                <a:latin typeface="Calibri"/>
+              <a:rPr sz="1600" b="1" spc="-5" dirty="0">
                 <a:cs typeface="Calibri"/>
               </a:rPr>
               <a:t>DHCP</a:t>
             </a:r>
             <a:r>
-              <a:rPr sz="2000" dirty="0">
-                <a:latin typeface="Calibri"/>
+              <a:rPr sz="1600" dirty="0">
                 <a:cs typeface="Calibri"/>
               </a:rPr>
               <a:t>)</a:t>
@@ -10478,142 +10599,126 @@
               </a:tabLst>
             </a:pPr>
             <a:r>
-              <a:rPr lang="es-MX" sz="1800" dirty="0">
+              <a:rPr lang="es-MX" sz="1600" dirty="0">
                 <a:effectLst/>
-                <a:latin typeface="Arial" panose="020B0604020202020204" pitchFamily="34" charset="0"/>
                 <a:ea typeface="Calibri" panose="020F0502020204030204" pitchFamily="34" charset="0"/>
                 <a:cs typeface="Times New Roman" panose="02020603050405020304" pitchFamily="18" charset="0"/>
               </a:rPr>
               <a:t>Configura</a:t>
             </a:r>
             <a:r>
-              <a:rPr lang="es-MX" sz="1800" spc="90" dirty="0">
+              <a:rPr lang="es-MX" sz="1600" spc="90" dirty="0">
                 <a:effectLst/>
-                <a:latin typeface="Arial" panose="020B0604020202020204" pitchFamily="34" charset="0"/>
                 <a:ea typeface="Calibri" panose="020F0502020204030204" pitchFamily="34" charset="0"/>
                 <a:cs typeface="Times New Roman" panose="02020603050405020304" pitchFamily="18" charset="0"/>
               </a:rPr>
               <a:t> </a:t>
             </a:r>
             <a:r>
-              <a:rPr lang="es-MX" sz="1800" spc="5" dirty="0">
+              <a:rPr lang="es-MX" sz="1600" spc="5" dirty="0">
                 <a:effectLst/>
-                <a:latin typeface="Arial" panose="020B0604020202020204" pitchFamily="34" charset="0"/>
                 <a:ea typeface="Calibri" panose="020F0502020204030204" pitchFamily="34" charset="0"/>
                 <a:cs typeface="Times New Roman" panose="02020603050405020304" pitchFamily="18" charset="0"/>
               </a:rPr>
               <a:t>la</a:t>
             </a:r>
             <a:r>
-              <a:rPr lang="es-MX" sz="1800" spc="95" dirty="0">
+              <a:rPr lang="es-MX" sz="1600" spc="95" dirty="0">
                 <a:effectLst/>
-                <a:latin typeface="Arial" panose="020B0604020202020204" pitchFamily="34" charset="0"/>
                 <a:ea typeface="Calibri" panose="020F0502020204030204" pitchFamily="34" charset="0"/>
                 <a:cs typeface="Times New Roman" panose="02020603050405020304" pitchFamily="18" charset="0"/>
               </a:rPr>
               <a:t> </a:t>
             </a:r>
             <a:r>
-              <a:rPr lang="es-MX" sz="1800" b="1" dirty="0">
+              <a:rPr lang="es-MX" sz="1600" b="1" dirty="0">
                 <a:effectLst/>
-                <a:latin typeface="Arial" panose="020B0604020202020204" pitchFamily="34" charset="0"/>
                 <a:ea typeface="Calibri" panose="020F0502020204030204" pitchFamily="34" charset="0"/>
                 <a:cs typeface="Times New Roman" panose="02020603050405020304" pitchFamily="18" charset="0"/>
               </a:rPr>
-              <a:t>VLAN1</a:t>
-            </a:r>
-            <a:r>
-              <a:rPr lang="es-MX" sz="1800" b="1" spc="250" dirty="0">
+              <a:t>VLAN 333</a:t>
+            </a:r>
+            <a:r>
+              <a:rPr lang="es-MX" sz="1600" b="1" spc="250" dirty="0">
                 <a:effectLst/>
-                <a:latin typeface="Arial" panose="020B0604020202020204" pitchFamily="34" charset="0"/>
                 <a:ea typeface="Calibri" panose="020F0502020204030204" pitchFamily="34" charset="0"/>
                 <a:cs typeface="Times New Roman" panose="02020603050405020304" pitchFamily="18" charset="0"/>
               </a:rPr>
               <a:t> </a:t>
             </a:r>
             <a:r>
-              <a:rPr lang="es-MX" sz="1800" spc="-5" dirty="0">
+              <a:rPr lang="es-MX" sz="1600" spc="-5" dirty="0">
                 <a:effectLst/>
-                <a:latin typeface="Arial" panose="020B0604020202020204" pitchFamily="34" charset="0"/>
                 <a:ea typeface="Calibri" panose="020F0502020204030204" pitchFamily="34" charset="0"/>
                 <a:cs typeface="Times New Roman" panose="02020603050405020304" pitchFamily="18" charset="0"/>
               </a:rPr>
               <a:t>del switch </a:t>
             </a:r>
             <a:r>
-              <a:rPr lang="es-MX" sz="1800" b="1" spc="-5" dirty="0">
+              <a:rPr lang="es-MX" sz="1600" b="1" spc="-5" dirty="0">
                 <a:effectLst/>
-                <a:latin typeface="Arial" panose="020B0604020202020204" pitchFamily="34" charset="0"/>
                 <a:ea typeface="Calibri" panose="020F0502020204030204" pitchFamily="34" charset="0"/>
                 <a:cs typeface="Times New Roman" panose="02020603050405020304" pitchFamily="18" charset="0"/>
               </a:rPr>
               <a:t>SCompany</a:t>
             </a:r>
             <a:r>
-              <a:rPr lang="es-MX" sz="1800" spc="-5" dirty="0">
+              <a:rPr lang="es-MX" sz="1600" spc="-5" dirty="0">
                 <a:effectLst/>
-                <a:latin typeface="Arial" panose="020B0604020202020204" pitchFamily="34" charset="0"/>
                 <a:ea typeface="Calibri" panose="020F0502020204030204" pitchFamily="34" charset="0"/>
                 <a:cs typeface="Times New Roman" panose="02020603050405020304" pitchFamily="18" charset="0"/>
               </a:rPr>
               <a:t> con la </a:t>
             </a:r>
             <a:r>
-              <a:rPr lang="es-MX" spc="-5" dirty="0">
-                <a:latin typeface="Arial" panose="020B0604020202020204" pitchFamily="34" charset="0"/>
+              <a:rPr lang="es-MX" sz="1600" spc="-5" dirty="0">
                 <a:ea typeface="Calibri" panose="020F0502020204030204" pitchFamily="34" charset="0"/>
                 <a:cs typeface="Times New Roman" panose="02020603050405020304" pitchFamily="18" charset="0"/>
               </a:rPr>
               <a:t>primera</a:t>
             </a:r>
             <a:r>
-              <a:rPr lang="es-MX" sz="1800" spc="-5" dirty="0">
+              <a:rPr lang="es-MX" sz="1600" spc="-5" dirty="0">
                 <a:effectLst/>
-                <a:latin typeface="Arial" panose="020B0604020202020204" pitchFamily="34" charset="0"/>
                 <a:ea typeface="Calibri" panose="020F0502020204030204" pitchFamily="34" charset="0"/>
                 <a:cs typeface="Times New Roman" panose="02020603050405020304" pitchFamily="18" charset="0"/>
               </a:rPr>
               <a:t> IP valida de la subred y el</a:t>
             </a:r>
             <a:r>
-              <a:rPr lang="es-MX" sz="1800" spc="5" dirty="0">
+              <a:rPr lang="es-MX" sz="1600" spc="5" dirty="0">
                 <a:effectLst/>
-                <a:latin typeface="Arial" panose="020B0604020202020204" pitchFamily="34" charset="0"/>
                 <a:ea typeface="Calibri" panose="020F0502020204030204" pitchFamily="34" charset="0"/>
                 <a:cs typeface="Times New Roman" panose="02020603050405020304" pitchFamily="18" charset="0"/>
               </a:rPr>
               <a:t> </a:t>
             </a:r>
             <a:r>
-              <a:rPr lang="es-MX" sz="1800" b="1" dirty="0">
+              <a:rPr lang="es-MX" sz="1600" b="1" dirty="0">
                 <a:effectLst/>
-                <a:latin typeface="Arial" panose="020B0604020202020204" pitchFamily="34" charset="0"/>
                 <a:ea typeface="Calibri" panose="020F0502020204030204" pitchFamily="34" charset="0"/>
                 <a:cs typeface="Times New Roman" panose="02020603050405020304" pitchFamily="18" charset="0"/>
               </a:rPr>
               <a:t>default </a:t>
             </a:r>
             <a:r>
-              <a:rPr lang="es-MX" sz="1800" b="1" spc="-5" dirty="0">
+              <a:rPr lang="es-MX" sz="1600" b="1" spc="-5" dirty="0">
                 <a:effectLst/>
-                <a:latin typeface="Arial" panose="020B0604020202020204" pitchFamily="34" charset="0"/>
                 <a:ea typeface="Calibri" panose="020F0502020204030204" pitchFamily="34" charset="0"/>
                 <a:cs typeface="Times New Roman" panose="02020603050405020304" pitchFamily="18" charset="0"/>
               </a:rPr>
               <a:t>Gateway</a:t>
             </a:r>
             <a:r>
-              <a:rPr lang="es-MX" sz="1800" spc="-5" dirty="0">
+              <a:rPr lang="es-MX" sz="1600" spc="-5" dirty="0">
                 <a:effectLst/>
-                <a:latin typeface="Arial" panose="020B0604020202020204" pitchFamily="34" charset="0"/>
                 <a:ea typeface="Calibri" panose="020F0502020204030204" pitchFamily="34" charset="0"/>
                 <a:cs typeface="Times New Roman" panose="02020603050405020304" pitchFamily="18" charset="0"/>
               </a:rPr>
               <a:t>.</a:t>
             </a:r>
-            <a:endParaRPr lang="es-MX" sz="1800" dirty="0">
+            <a:endParaRPr lang="es-MX" sz="1600" dirty="0">
               <a:effectLst/>
-              <a:latin typeface="Calibri" panose="020F0502020204030204" pitchFamily="34" charset="0"/>
               <a:ea typeface="Calibri" panose="020F0502020204030204" pitchFamily="34" charset="0"/>
               <a:cs typeface="Times New Roman" panose="02020603050405020304" pitchFamily="18" charset="0"/>
             </a:endParaRPr>
@@ -10630,260 +10735,223 @@
               </a:tabLst>
             </a:pPr>
             <a:r>
-              <a:rPr lang="es-ES" sz="2000" spc="-20" dirty="0">
-                <a:latin typeface="Calibri"/>
+              <a:rPr lang="es-ES" sz="1600" spc="-20" dirty="0">
                 <a:cs typeface="Calibri"/>
               </a:rPr>
               <a:t>Deb</a:t>
             </a:r>
             <a:r>
-              <a:rPr lang="es-ES" sz="2000" spc="-10" dirty="0">
-                <a:latin typeface="Calibri"/>
+              <a:rPr lang="es-ES" sz="1600" spc="-10" dirty="0">
                 <a:cs typeface="Calibri"/>
               </a:rPr>
               <a:t>e</a:t>
             </a:r>
             <a:r>
-              <a:rPr lang="es-ES" sz="2000" dirty="0">
-                <a:latin typeface="Calibri"/>
+              <a:rPr lang="es-ES" sz="1600" dirty="0">
                 <a:cs typeface="Calibri"/>
               </a:rPr>
               <a:t>mos</a:t>
             </a:r>
             <a:r>
-              <a:rPr lang="es-ES" sz="2000" spc="20" dirty="0">
-                <a:latin typeface="Calibri"/>
+              <a:rPr lang="es-ES" sz="1600" spc="20" dirty="0">
                 <a:cs typeface="Calibri"/>
               </a:rPr>
               <a:t> </a:t>
             </a:r>
             <a:r>
-              <a:rPr lang="es-ES" sz="2000" spc="-35" dirty="0">
-                <a:latin typeface="Calibri"/>
+              <a:rPr lang="es-ES" sz="1600" spc="-35" dirty="0">
                 <a:cs typeface="Calibri"/>
               </a:rPr>
               <a:t>c</a:t>
             </a:r>
             <a:r>
-              <a:rPr lang="es-ES" sz="2000" spc="-5" dirty="0">
-                <a:latin typeface="Calibri"/>
+              <a:rPr lang="es-ES" sz="1600" spc="-5" dirty="0">
                 <a:cs typeface="Calibri"/>
               </a:rPr>
               <a:t>onec</a:t>
             </a:r>
             <a:r>
-              <a:rPr lang="es-ES" sz="2000" spc="-20" dirty="0">
-                <a:latin typeface="Calibri"/>
+              <a:rPr lang="es-ES" sz="1600" spc="-20" dirty="0">
                 <a:cs typeface="Calibri"/>
               </a:rPr>
               <a:t>t</a:t>
             </a:r>
             <a:r>
-              <a:rPr lang="es-ES" sz="2000" spc="-10" dirty="0">
-                <a:latin typeface="Calibri"/>
+              <a:rPr lang="es-ES" sz="1600" spc="-10" dirty="0">
                 <a:cs typeface="Calibri"/>
               </a:rPr>
               <a:t>ar</a:t>
             </a:r>
             <a:r>
-              <a:rPr lang="es-ES" sz="2000" spc="20" dirty="0">
-                <a:latin typeface="Calibri"/>
+              <a:rPr lang="es-ES" sz="1600" spc="20" dirty="0">
                 <a:cs typeface="Calibri"/>
               </a:rPr>
               <a:t> </a:t>
             </a:r>
             <a:r>
-              <a:rPr lang="es-ES" sz="2000" dirty="0">
-                <a:latin typeface="Calibri"/>
+              <a:rPr lang="es-ES" sz="1600" dirty="0">
                 <a:cs typeface="Calibri"/>
               </a:rPr>
               <a:t>la</a:t>
             </a:r>
             <a:r>
-              <a:rPr lang="es-ES" sz="2000" spc="20" dirty="0">
-                <a:latin typeface="Calibri"/>
+              <a:rPr lang="es-ES" sz="1600" spc="20" dirty="0">
                 <a:cs typeface="Calibri"/>
               </a:rPr>
               <a:t> </a:t>
             </a:r>
             <a:r>
-              <a:rPr lang="es-ES" sz="2000" spc="-55" dirty="0">
-                <a:latin typeface="Calibri"/>
+              <a:rPr lang="es-ES" sz="1600" spc="-55" dirty="0">
                 <a:cs typeface="Calibri"/>
               </a:rPr>
               <a:t>r</a:t>
             </a:r>
             <a:r>
-              <a:rPr lang="es-ES" sz="2000" spc="-15" dirty="0">
-                <a:latin typeface="Calibri"/>
+              <a:rPr lang="es-ES" sz="1600" spc="-15" dirty="0">
                 <a:cs typeface="Calibri"/>
               </a:rPr>
               <a:t>ed</a:t>
             </a:r>
             <a:r>
-              <a:rPr lang="es-ES" sz="2000" spc="25" dirty="0">
-                <a:latin typeface="Calibri"/>
+              <a:rPr lang="es-ES" sz="1600" spc="25" dirty="0">
                 <a:cs typeface="Calibri"/>
               </a:rPr>
               <a:t> </a:t>
             </a:r>
             <a:r>
-              <a:rPr lang="es-ES" sz="2000" dirty="0">
-                <a:latin typeface="Calibri"/>
+              <a:rPr lang="es-ES" sz="1600" dirty="0">
                 <a:cs typeface="Calibri"/>
               </a:rPr>
               <a:t>lo</a:t>
             </a:r>
             <a:r>
-              <a:rPr lang="es-ES" sz="2000" spc="-30" dirty="0">
-                <a:latin typeface="Calibri"/>
+              <a:rPr lang="es-ES" sz="1600" spc="-30" dirty="0">
                 <a:cs typeface="Calibri"/>
               </a:rPr>
               <a:t>c</a:t>
             </a:r>
             <a:r>
-              <a:rPr lang="es-ES" sz="2000" dirty="0">
-                <a:latin typeface="Calibri"/>
+              <a:rPr lang="es-ES" sz="1600" dirty="0">
                 <a:cs typeface="Calibri"/>
               </a:rPr>
               <a:t>al</a:t>
             </a:r>
             <a:r>
-              <a:rPr lang="es-ES" sz="2000" spc="25" dirty="0">
-                <a:latin typeface="Calibri"/>
+              <a:rPr lang="es-ES" sz="1600" spc="25" dirty="0">
                 <a:cs typeface="Calibri"/>
               </a:rPr>
               <a:t> </a:t>
             </a:r>
             <a:r>
-              <a:rPr lang="es-ES" sz="2000" dirty="0">
-                <a:latin typeface="Calibri"/>
+              <a:rPr lang="es-ES" sz="1600" dirty="0">
                 <a:cs typeface="Calibri"/>
               </a:rPr>
               <a:t>a</a:t>
             </a:r>
             <a:r>
-              <a:rPr lang="es-ES" sz="2000" spc="20" dirty="0">
-                <a:latin typeface="Calibri"/>
+              <a:rPr lang="es-ES" sz="1600" spc="20" dirty="0">
                 <a:cs typeface="Calibri"/>
               </a:rPr>
               <a:t> </a:t>
             </a:r>
             <a:r>
-              <a:rPr lang="es-ES" sz="2000" dirty="0">
-                <a:latin typeface="Calibri"/>
+              <a:rPr lang="es-ES" sz="1600" dirty="0">
                 <a:cs typeface="Calibri"/>
               </a:rPr>
               <a:t>los</a:t>
             </a:r>
             <a:r>
-              <a:rPr lang="es-ES" sz="2000" spc="10" dirty="0">
-                <a:latin typeface="Calibri"/>
+              <a:rPr lang="es-ES" sz="1600" spc="10" dirty="0">
                 <a:cs typeface="Calibri"/>
               </a:rPr>
               <a:t> </a:t>
             </a:r>
             <a:r>
-              <a:rPr lang="es-ES" sz="2000" spc="-20" dirty="0">
-                <a:latin typeface="Calibri"/>
+              <a:rPr lang="es-ES" sz="1600" spc="-20" dirty="0">
                 <a:cs typeface="Calibri"/>
               </a:rPr>
               <a:t>se</a:t>
             </a:r>
             <a:r>
-              <a:rPr lang="es-ES" sz="2000" spc="15" dirty="0">
-                <a:latin typeface="Calibri"/>
+              <a:rPr lang="es-ES" sz="1600" spc="15" dirty="0">
                 <a:cs typeface="Calibri"/>
               </a:rPr>
               <a:t>r</a:t>
             </a:r>
             <a:r>
-              <a:rPr lang="es-ES" sz="2000" dirty="0">
-                <a:latin typeface="Calibri"/>
+              <a:rPr lang="es-ES" sz="1600" dirty="0">
                 <a:cs typeface="Calibri"/>
               </a:rPr>
               <a:t>vicios</a:t>
             </a:r>
             <a:r>
-              <a:rPr lang="es-ES" sz="2000" spc="15" dirty="0">
-                <a:latin typeface="Calibri"/>
+              <a:rPr lang="es-ES" sz="1600" spc="15" dirty="0">
                 <a:cs typeface="Calibri"/>
               </a:rPr>
               <a:t> </a:t>
             </a:r>
             <a:r>
-              <a:rPr lang="es-ES" sz="2000" spc="-20" dirty="0">
-                <a:latin typeface="Calibri"/>
+              <a:rPr lang="es-ES" sz="1600" spc="-20" dirty="0">
                 <a:cs typeface="Calibri"/>
               </a:rPr>
               <a:t>d</a:t>
             </a:r>
             <a:r>
-              <a:rPr lang="es-ES" sz="2000" spc="-15" dirty="0">
-                <a:latin typeface="Calibri"/>
+              <a:rPr lang="es-ES" sz="1600" spc="-15" dirty="0">
                 <a:cs typeface="Calibri"/>
               </a:rPr>
               <a:t>e</a:t>
             </a:r>
             <a:r>
-              <a:rPr lang="es-ES" sz="2000" spc="25" dirty="0">
-                <a:latin typeface="Calibri"/>
+              <a:rPr lang="es-ES" sz="1600" spc="25" dirty="0">
                 <a:cs typeface="Calibri"/>
               </a:rPr>
               <a:t> </a:t>
             </a:r>
             <a:r>
-              <a:rPr lang="es-ES" sz="2000" dirty="0">
-                <a:latin typeface="Calibri"/>
+              <a:rPr lang="es-ES" sz="1600" dirty="0">
                 <a:cs typeface="Calibri"/>
               </a:rPr>
               <a:t>I</a:t>
             </a:r>
             <a:r>
-              <a:rPr lang="es-ES" sz="2000" spc="-30" dirty="0">
-                <a:latin typeface="Calibri"/>
+              <a:rPr lang="es-ES" sz="1600" spc="-30" dirty="0">
                 <a:cs typeface="Calibri"/>
               </a:rPr>
               <a:t>n</a:t>
             </a:r>
             <a:r>
-              <a:rPr lang="es-ES" sz="2000" spc="-35" dirty="0">
-                <a:latin typeface="Calibri"/>
+              <a:rPr lang="es-ES" sz="1600" spc="-35" dirty="0">
                 <a:cs typeface="Calibri"/>
               </a:rPr>
               <a:t>t</a:t>
             </a:r>
             <a:r>
-              <a:rPr lang="es-ES" sz="2000" spc="-15" dirty="0">
-                <a:latin typeface="Calibri"/>
+              <a:rPr lang="es-ES" sz="1600" spc="-15" dirty="0">
                 <a:cs typeface="Calibri"/>
               </a:rPr>
               <a:t>e</a:t>
             </a:r>
             <a:r>
-              <a:rPr lang="es-ES" sz="2000" dirty="0">
-                <a:latin typeface="Calibri"/>
+              <a:rPr lang="es-ES" sz="1600" dirty="0">
                 <a:cs typeface="Calibri"/>
               </a:rPr>
               <a:t>r</a:t>
             </a:r>
             <a:r>
-              <a:rPr lang="es-ES" sz="2000" spc="-20" dirty="0">
-                <a:latin typeface="Calibri"/>
+              <a:rPr lang="es-ES" sz="1600" spc="-20" dirty="0">
                 <a:cs typeface="Calibri"/>
               </a:rPr>
               <a:t>net. Para interconectar la red local con el proveedor de servicios es necesario instalar una </a:t>
             </a:r>
             <a:r>
-              <a:rPr lang="es-ES" sz="2000" b="1" spc="-20" dirty="0">
-                <a:latin typeface="Calibri"/>
+              <a:rPr lang="es-ES" sz="1600" b="1" spc="-20" dirty="0">
                 <a:cs typeface="Calibri"/>
               </a:rPr>
               <a:t>ruta por default</a:t>
             </a:r>
             <a:r>
-              <a:rPr lang="es-ES" sz="2000" spc="-20" dirty="0">
-                <a:latin typeface="Calibri"/>
+              <a:rPr lang="es-ES" sz="1600" spc="-20" dirty="0">
                 <a:cs typeface="Calibri"/>
               </a:rPr>
               <a:t>. </a:t>
@@ -10901,22 +10969,19 @@
               </a:tabLst>
             </a:pPr>
             <a:r>
-              <a:rPr lang="es-ES" sz="2000" spc="-20" dirty="0">
-                <a:latin typeface="Calibri"/>
+              <a:rPr lang="es-ES" sz="1600" spc="-20" dirty="0">
                 <a:cs typeface="Calibri"/>
               </a:rPr>
               <a:t>Debemos configurar rutas estáticas en el </a:t>
             </a:r>
             <a:r>
-              <a:rPr lang="es-ES" sz="2000" b="1" spc="-20" dirty="0">
-                <a:latin typeface="Calibri"/>
+              <a:rPr lang="es-ES" sz="1600" b="1" spc="-20" dirty="0">
                 <a:cs typeface="Calibri"/>
               </a:rPr>
               <a:t>ISP</a:t>
             </a:r>
             <a:r>
-              <a:rPr lang="es-ES" sz="2000" spc="-20" dirty="0">
-                <a:latin typeface="Calibri"/>
+              <a:rPr lang="es-ES" sz="1600" spc="-20" dirty="0">
                 <a:cs typeface="Calibri"/>
               </a:rPr>
               <a:t> para que se pueda conectar con la red local.</a:t>
@@ -10934,175 +10999,150 @@
               </a:tabLst>
             </a:pPr>
             <a:r>
-              <a:rPr lang="es-MX" sz="2000" spc="-50" noProof="1">
-                <a:latin typeface="Calibri"/>
+              <a:rPr lang="es-MX" sz="1600" spc="-50" noProof="1">
                 <a:cs typeface="Calibri"/>
               </a:rPr>
               <a:t>R</a:t>
             </a:r>
             <a:r>
-              <a:rPr lang="es-MX" sz="2000" spc="-15" noProof="1">
-                <a:latin typeface="Calibri"/>
+              <a:rPr lang="es-MX" sz="1600" spc="-15" noProof="1">
                 <a:cs typeface="Calibri"/>
               </a:rPr>
               <a:t>ea</a:t>
             </a:r>
             <a:r>
-              <a:rPr lang="es-MX" sz="2000" noProof="1">
-                <a:latin typeface="Calibri"/>
+              <a:rPr lang="es-MX" sz="1600" noProof="1">
                 <a:cs typeface="Calibri"/>
               </a:rPr>
               <a:t>li</a:t>
             </a:r>
             <a:r>
-              <a:rPr lang="es-MX" sz="2000" spc="-40" noProof="1">
-                <a:latin typeface="Calibri"/>
+              <a:rPr lang="es-MX" sz="1600" spc="-40" noProof="1">
                 <a:cs typeface="Calibri"/>
               </a:rPr>
               <a:t>z</a:t>
             </a:r>
             <a:r>
-              <a:rPr lang="es-MX" sz="2000" spc="-10" noProof="1">
-                <a:latin typeface="Calibri"/>
+              <a:rPr lang="es-MX" sz="1600" spc="-10" noProof="1">
                 <a:cs typeface="Calibri"/>
               </a:rPr>
               <a:t>a</a:t>
             </a:r>
             <a:r>
-              <a:rPr sz="2000" spc="-30" dirty="0">
-                <a:latin typeface="Calibri"/>
+              <a:rPr sz="1600" spc="-30" dirty="0">
                 <a:cs typeface="Calibri"/>
               </a:rPr>
               <a:t> </a:t>
             </a:r>
             <a:r>
-              <a:rPr sz="2000" dirty="0">
-                <a:latin typeface="Calibri"/>
+              <a:rPr sz="1600" dirty="0">
                 <a:cs typeface="Calibri"/>
               </a:rPr>
               <a:t>las</a:t>
             </a:r>
             <a:r>
-              <a:rPr sz="2000" spc="-5" dirty="0">
-                <a:latin typeface="Calibri"/>
+              <a:rPr sz="1600" spc="-5" dirty="0">
                 <a:cs typeface="Calibri"/>
               </a:rPr>
               <a:t> </a:t>
             </a:r>
             <a:r>
-              <a:rPr sz="2000" b="1" spc="-20" dirty="0">
-                <a:latin typeface="Calibri"/>
+              <a:rPr sz="1600" b="1" spc="-20" dirty="0">
                 <a:cs typeface="Calibri"/>
               </a:rPr>
               <a:t>pru</a:t>
             </a:r>
             <a:r>
-              <a:rPr sz="2000" b="1" spc="-10" dirty="0">
-                <a:latin typeface="Calibri"/>
+              <a:rPr sz="1600" b="1" spc="-10" dirty="0">
                 <a:cs typeface="Calibri"/>
               </a:rPr>
               <a:t>e</a:t>
             </a:r>
             <a:r>
-              <a:rPr sz="2000" b="1" spc="-5" dirty="0">
-                <a:latin typeface="Calibri"/>
+              <a:rPr sz="1600" b="1" spc="-5" dirty="0">
                 <a:cs typeface="Calibri"/>
               </a:rPr>
               <a:t>ba</a:t>
             </a:r>
             <a:r>
-              <a:rPr sz="2000" b="1" dirty="0">
-                <a:latin typeface="Calibri"/>
+              <a:rPr sz="1600" b="1" dirty="0">
                 <a:cs typeface="Calibri"/>
               </a:rPr>
               <a:t>s </a:t>
             </a:r>
             <a:r>
-              <a:rPr sz="2000" b="1" spc="-20" dirty="0">
-                <a:latin typeface="Calibri"/>
+              <a:rPr sz="1600" b="1" spc="-20" dirty="0">
                 <a:cs typeface="Calibri"/>
               </a:rPr>
               <a:t>d</a:t>
             </a:r>
             <a:r>
-              <a:rPr sz="2000" b="1" spc="-15" dirty="0">
-                <a:latin typeface="Calibri"/>
+              <a:rPr sz="1600" b="1" spc="-15" dirty="0">
                 <a:cs typeface="Calibri"/>
               </a:rPr>
               <a:t>e</a:t>
             </a:r>
             <a:r>
-              <a:rPr sz="2000" b="1" dirty="0">
-                <a:latin typeface="Calibri"/>
+              <a:rPr sz="1600" b="1" dirty="0">
                 <a:cs typeface="Calibri"/>
               </a:rPr>
               <a:t> </a:t>
             </a:r>
             <a:r>
-              <a:rPr sz="2000" b="1" spc="-35" dirty="0">
-                <a:latin typeface="Calibri"/>
+              <a:rPr sz="1600" b="1" spc="-35" dirty="0">
                 <a:cs typeface="Calibri"/>
               </a:rPr>
               <a:t>c</a:t>
             </a:r>
             <a:r>
-              <a:rPr sz="2000" b="1" spc="-5" dirty="0">
-                <a:latin typeface="Calibri"/>
+              <a:rPr sz="1600" b="1" spc="-5" dirty="0">
                 <a:cs typeface="Calibri"/>
               </a:rPr>
               <a:t>onectivida</a:t>
             </a:r>
             <a:r>
-              <a:rPr sz="2000" b="1" dirty="0">
-                <a:latin typeface="Calibri"/>
+              <a:rPr sz="1600" b="1" dirty="0">
                 <a:cs typeface="Calibri"/>
               </a:rPr>
               <a:t>d</a:t>
             </a:r>
             <a:r>
-              <a:rPr sz="2000" b="1" spc="10" dirty="0">
-                <a:latin typeface="Calibri"/>
+              <a:rPr sz="1600" b="1" spc="10" dirty="0">
                 <a:cs typeface="Calibri"/>
               </a:rPr>
               <a:t> </a:t>
             </a:r>
             <a:r>
-              <a:rPr sz="2000" spc="-20" dirty="0" err="1">
-                <a:latin typeface="Calibri"/>
+              <a:rPr sz="1600" spc="-20" dirty="0" err="1">
                 <a:cs typeface="Calibri"/>
               </a:rPr>
               <a:t>ne</a:t>
             </a:r>
             <a:r>
-              <a:rPr sz="2000" spc="-10" dirty="0" err="1">
-                <a:latin typeface="Calibri"/>
+              <a:rPr sz="1600" spc="-10" dirty="0" err="1">
                 <a:cs typeface="Calibri"/>
               </a:rPr>
               <a:t>c</a:t>
             </a:r>
             <a:r>
-              <a:rPr sz="2000" spc="-15" dirty="0" err="1">
-                <a:latin typeface="Calibri"/>
+              <a:rPr sz="1600" spc="-15" dirty="0" err="1">
                 <a:cs typeface="Calibri"/>
               </a:rPr>
               <a:t>esar</a:t>
             </a:r>
             <a:r>
-              <a:rPr sz="2000" dirty="0" err="1">
-                <a:latin typeface="Calibri"/>
+              <a:rPr sz="1600" dirty="0" err="1">
                 <a:cs typeface="Calibri"/>
               </a:rPr>
               <a:t>ias</a:t>
             </a:r>
             <a:r>
-              <a:rPr sz="2000" dirty="0">
-                <a:latin typeface="Calibri"/>
+              <a:rPr sz="1600" dirty="0">
                 <a:cs typeface="Calibri"/>
               </a:rPr>
               <a:t>.</a:t>
             </a:r>
-            <a:endParaRPr lang="es-MX" sz="2000" dirty="0">
-              <a:latin typeface="Calibri"/>
+            <a:endParaRPr lang="es-MX" sz="1600" dirty="0">
               <a:cs typeface="Calibri"/>
             </a:endParaRPr>
           </a:p>
@@ -11118,35 +11158,30 @@
               </a:tabLst>
             </a:pPr>
             <a:r>
-              <a:rPr lang="es-MX" sz="2000" dirty="0">
-                <a:latin typeface="Calibri"/>
+              <a:rPr lang="es-MX" sz="1600" dirty="0">
                 <a:cs typeface="Calibri"/>
               </a:rPr>
               <a:t>Configura el switch </a:t>
             </a:r>
             <a:r>
-              <a:rPr lang="es-MX" sz="2000" b="1" dirty="0" err="1">
-                <a:latin typeface="Calibri"/>
+              <a:rPr lang="es-MX" sz="1600" b="1" dirty="0" err="1">
                 <a:cs typeface="Calibri"/>
               </a:rPr>
               <a:t>SCompany</a:t>
             </a:r>
             <a:r>
-              <a:rPr lang="es-MX" sz="2000" b="1" dirty="0">
-                <a:latin typeface="Calibri"/>
+              <a:rPr lang="es-MX" sz="1600" b="1" dirty="0">
                 <a:cs typeface="Calibri"/>
               </a:rPr>
               <a:t> </a:t>
             </a:r>
             <a:r>
-              <a:rPr lang="es-MX" sz="2000" dirty="0">
-                <a:latin typeface="Calibri"/>
+              <a:rPr lang="es-MX" sz="1600" dirty="0">
                 <a:cs typeface="Calibri"/>
               </a:rPr>
               <a:t>para acceso remoto por SSH.</a:t>
             </a:r>
-            <a:endParaRPr sz="2000" dirty="0">
-              <a:latin typeface="Calibri"/>
+            <a:endParaRPr sz="1600" dirty="0">
               <a:cs typeface="Calibri"/>
             </a:endParaRPr>
           </a:p>
@@ -11260,7 +11295,7 @@
         </p:blipFill>
         <p:spPr>
           <a:xfrm>
-            <a:off x="8930434" y="4689022"/>
+            <a:off x="8715937" y="4572000"/>
             <a:ext cx="2485571" cy="1864178"/>
           </a:xfrm>
           <a:prstGeom prst="rect">
@@ -11620,10 +11655,10 @@
       </p:sp>
       <p:pic>
         <p:nvPicPr>
-          <p:cNvPr id="5" name="Picture 4">
+          <p:cNvPr id="4" name="Imagen 3">
             <a:extLst>
               <a:ext uri="{FF2B5EF4-FFF2-40B4-BE49-F238E27FC236}">
-                <a16:creationId xmlns:a16="http://schemas.microsoft.com/office/drawing/2014/main" id="{4DC6B032-87D3-7C7F-265B-A797D17D2AAD}"/>
+                <a16:creationId xmlns:a16="http://schemas.microsoft.com/office/drawing/2014/main" id="{B0FC9CF1-F510-2BEB-2B19-7C782EE7DCCD}"/>
               </a:ext>
             </a:extLst>
           </p:cNvPr>
@@ -11640,8 +11675,8 @@
         </p:blipFill>
         <p:spPr>
           <a:xfrm>
-            <a:off x="3886200" y="1752600"/>
-            <a:ext cx="7848600" cy="4301837"/>
+            <a:off x="3886200" y="1524000"/>
+            <a:ext cx="7925831" cy="4337833"/>
           </a:xfrm>
           <a:prstGeom prst="rect">
             <a:avLst/>
@@ -11758,10 +11793,10 @@
       </p:grpSpPr>
       <p:pic>
         <p:nvPicPr>
-          <p:cNvPr id="5" name="Picture 4">
+          <p:cNvPr id="4" name="Imagen 3">
             <a:extLst>
               <a:ext uri="{FF2B5EF4-FFF2-40B4-BE49-F238E27FC236}">
-                <a16:creationId xmlns:a16="http://schemas.microsoft.com/office/drawing/2014/main" id="{F79CD346-055E-7D20-8806-3ACF5721EC78}"/>
+                <a16:creationId xmlns:a16="http://schemas.microsoft.com/office/drawing/2014/main" id="{85C5EBEF-DB5D-84ED-7C09-9B1301E8405B}"/>
               </a:ext>
             </a:extLst>
           </p:cNvPr>
@@ -11778,8 +11813,8 @@
         </p:blipFill>
         <p:spPr>
           <a:xfrm>
-            <a:off x="3657600" y="1687664"/>
-            <a:ext cx="7898655" cy="4329272"/>
+            <a:off x="3886200" y="1762918"/>
+            <a:ext cx="7917149" cy="4333082"/>
           </a:xfrm>
           <a:prstGeom prst="rect">
             <a:avLst/>
@@ -12250,25 +12285,60 @@
               <a:t>, </a:t>
             </a:r>
             <a:r>
+              <a:rPr lang="es-ES" sz="1400" b="1" dirty="0" err="1">
+                <a:latin typeface="Arial" panose="020B0604020202020204" pitchFamily="34" charset="0"/>
+                <a:cs typeface="Arial" panose="020B0604020202020204" pitchFamily="34" charset="0"/>
+              </a:rPr>
+              <a:t>vlan</a:t>
+            </a:r>
+            <a:r>
               <a:rPr lang="es-ES" sz="1400" b="1" dirty="0">
                 <a:latin typeface="Arial" panose="020B0604020202020204" pitchFamily="34" charset="0"/>
                 <a:cs typeface="Arial" panose="020B0604020202020204" pitchFamily="34" charset="0"/>
               </a:rPr>
-              <a:t>vlan 20 </a:t>
+              <a:t> 20</a:t>
             </a:r>
             <a:r>
               <a:rPr lang="es-ES" sz="1400" dirty="0">
                 <a:latin typeface="Arial" panose="020B0604020202020204" pitchFamily="34" charset="0"/>
                 <a:cs typeface="Arial" panose="020B0604020202020204" pitchFamily="34" charset="0"/>
               </a:rPr>
-              <a:t>y </a:t>
+              <a:t>, </a:t>
+            </a:r>
+            <a:r>
+              <a:rPr lang="es-ES" sz="1400" b="1" dirty="0" err="1">
+                <a:latin typeface="Arial" panose="020B0604020202020204" pitchFamily="34" charset="0"/>
+                <a:cs typeface="Arial" panose="020B0604020202020204" pitchFamily="34" charset="0"/>
+              </a:rPr>
+              <a:t>vlan</a:t>
             </a:r>
             <a:r>
               <a:rPr lang="es-ES" sz="1400" b="1" dirty="0">
                 <a:latin typeface="Arial" panose="020B0604020202020204" pitchFamily="34" charset="0"/>
                 <a:cs typeface="Arial" panose="020B0604020202020204" pitchFamily="34" charset="0"/>
               </a:rPr>
-              <a:t>vlan 30</a:t>
+              <a:t> 30</a:t>
+            </a:r>
+            <a:r>
+              <a:rPr lang="es-ES" sz="1400" dirty="0">
+                <a:latin typeface="Arial" panose="020B0604020202020204" pitchFamily="34" charset="0"/>
+                <a:cs typeface="Arial" panose="020B0604020202020204" pitchFamily="34" charset="0"/>
+              </a:rPr>
+              <a:t> y </a:t>
+            </a:r>
+            <a:r>
+              <a:rPr lang="es-ES" sz="1400" b="1" dirty="0" err="1">
+                <a:latin typeface="Arial" panose="020B0604020202020204" pitchFamily="34" charset="0"/>
+                <a:cs typeface="Arial" panose="020B0604020202020204" pitchFamily="34" charset="0"/>
+              </a:rPr>
+              <a:t>vlan</a:t>
+            </a:r>
+            <a:r>
+              <a:rPr lang="es-ES" sz="1400" b="1" dirty="0">
+                <a:latin typeface="Arial" panose="020B0604020202020204" pitchFamily="34" charset="0"/>
+                <a:cs typeface="Arial" panose="020B0604020202020204" pitchFamily="34" charset="0"/>
+              </a:rPr>
+              <a:t> 333</a:t>
             </a:r>
             <a:r>
               <a:rPr lang="es-ES" sz="1400" dirty="0">
@@ -13089,10 +13159,10 @@
       </p:grpSpPr>
       <p:pic>
         <p:nvPicPr>
-          <p:cNvPr id="5" name="Picture 4">
+          <p:cNvPr id="4" name="Imagen 3">
             <a:extLst>
               <a:ext uri="{FF2B5EF4-FFF2-40B4-BE49-F238E27FC236}">
-                <a16:creationId xmlns:a16="http://schemas.microsoft.com/office/drawing/2014/main" id="{AED2598F-2E9F-C66F-7942-6CDBCFF5840B}"/>
+                <a16:creationId xmlns:a16="http://schemas.microsoft.com/office/drawing/2014/main" id="{8322C4C9-DB25-1324-6EE7-F32B1204EAFB}"/>
               </a:ext>
             </a:extLst>
           </p:cNvPr>
@@ -13109,8 +13179,8 @@
         </p:blipFill>
         <p:spPr>
           <a:xfrm>
-            <a:off x="2848175" y="1945599"/>
-            <a:ext cx="8581825" cy="4703719"/>
+            <a:off x="2971800" y="1981200"/>
+            <a:ext cx="8077200" cy="4420678"/>
           </a:xfrm>
           <a:prstGeom prst="rect">
             <a:avLst/>
@@ -13332,7 +13402,7 @@
                 <a:latin typeface="Arial" panose="020B0604020202020204" pitchFamily="34" charset="0"/>
                 <a:cs typeface="Arial" panose="020B0604020202020204" pitchFamily="34" charset="0"/>
               </a:rPr>
-              <a:t>Tenemos tres subredes asociadas con las </a:t>
+              <a:t>Tenemos cuatro subredes asociadas con las </a:t>
             </a:r>
             <a:r>
               <a:rPr lang="es-ES_tradnl" sz="1600" b="1" dirty="0">
@@ -13345,7 +13415,7 @@
                 <a:latin typeface="Arial" panose="020B0604020202020204" pitchFamily="34" charset="0"/>
                 <a:cs typeface="Arial" panose="020B0604020202020204" pitchFamily="34" charset="0"/>
               </a:rPr>
-              <a:t>VLANs 10, 20 y 30</a:t>
+              <a:t>VLANs 10, 20, 30 y 333</a:t>
             </a:r>
             <a:r>
               <a:rPr lang="es-ES_tradnl" sz="1600" dirty="0">
@@ -14772,36 +14842,6 @@
           </a:p>
         </p:txBody>
       </p:sp>
-      <p:pic>
-        <p:nvPicPr>
-          <p:cNvPr id="4" name="Picture 3">
-            <a:extLst>
-              <a:ext uri="{FF2B5EF4-FFF2-40B4-BE49-F238E27FC236}">
-                <a16:creationId xmlns:a16="http://schemas.microsoft.com/office/drawing/2014/main" id="{C5B68192-12F1-9C84-F7F1-D2666B36541B}"/>
-              </a:ext>
-            </a:extLst>
-          </p:cNvPr>
-          <p:cNvPicPr>
-            <a:picLocks noChangeAspect="1"/>
-          </p:cNvPicPr>
-          <p:nvPr/>
-        </p:nvPicPr>
-        <p:blipFill>
-          <a:blip r:embed="rId3"/>
-          <a:stretch>
-            <a:fillRect/>
-          </a:stretch>
-        </p:blipFill>
-        <p:spPr>
-          <a:xfrm>
-            <a:off x="1714500" y="1676400"/>
-            <a:ext cx="8763000" cy="4803021"/>
-          </a:xfrm>
-          <a:prstGeom prst="rect">
-            <a:avLst/>
-          </a:prstGeom>
-        </p:spPr>
-      </p:pic>
       <p:sp>
         <p:nvSpPr>
           <p:cNvPr id="2" name="Rectangle 2">
@@ -14903,6 +14943,36 @@
           </a:p>
         </p:txBody>
       </p:sp>
+      <p:pic>
+        <p:nvPicPr>
+          <p:cNvPr id="6" name="Imagen 5">
+            <a:extLst>
+              <a:ext uri="{FF2B5EF4-FFF2-40B4-BE49-F238E27FC236}">
+                <a16:creationId xmlns:a16="http://schemas.microsoft.com/office/drawing/2014/main" id="{3EF09992-1C91-E91E-2535-277F869187DF}"/>
+              </a:ext>
+            </a:extLst>
+          </p:cNvPr>
+          <p:cNvPicPr>
+            <a:picLocks noChangeAspect="1"/>
+          </p:cNvPicPr>
+          <p:nvPr/>
+        </p:nvPicPr>
+        <p:blipFill>
+          <a:blip r:embed="rId3"/>
+          <a:stretch>
+            <a:fillRect/>
+          </a:stretch>
+        </p:blipFill>
+        <p:spPr>
+          <a:xfrm>
+            <a:off x="1371600" y="1600200"/>
+            <a:ext cx="8771371" cy="4800600"/>
+          </a:xfrm>
+          <a:prstGeom prst="rect">
+            <a:avLst/>
+          </a:prstGeom>
+        </p:spPr>
+      </p:pic>
     </p:spTree>
     <p:extLst>
       <p:ext uri="{BB962C8B-B14F-4D97-AF65-F5344CB8AC3E}">
